--- a/Backend/services/pptx-generator-service/slides/global/sumario.pptx
+++ b/Backend/services/pptx-generator-service/slides/global/sumario.pptx
@@ -118,8 +118,7 @@
 <file path=ppt/revisionInfo.xml><?xml version="1.0" encoding="utf-8"?>
 <p1510:revInfo xmlns:a="http://schemas.openxmlformats.org/drawingml/2006/main" xmlns:r="http://schemas.openxmlformats.org/officeDocument/2006/relationships" xmlns:p1510="http://schemas.microsoft.com/office/powerpoint/2015/10/main">
   <p1510:revLst>
-    <p1510:client id="{5857BE05-37A1-BC0B-350A-8C87333FF5F4}" v="53" dt="2026-05-20T15:47:06.092"/>
-    <p1510:client id="{7EBE831E-095E-0FB3-C8EC-E08C03E26D19}" v="22" dt="2026-05-18T18:02:17.862"/>
+    <p1510:client id="{65108A40-012A-D12E-02C7-0A545B7A839A}" v="54" dt="2026-05-26T18:04:49.809"/>
   </p1510:revLst>
 </p1510:revInfo>
 </file>
@@ -205,7 +204,7 @@
           </a:lstStyle>
           <a:p>
             <a:fld id="{B73550D1-219E-4B53-A522-9B245522E889}" type="datetimeFigureOut">
-              <a:t>20/05/2026</a:t>
+              <a:t>26/05/2026</a:t>
             </a:fld>
             <a:endParaRPr lang="pt-BR"/>
           </a:p>
@@ -743,7 +742,7 @@
           <a:p>
             <a:fld id="{F0E51C7C-CEA3-4CAA-BE4B-344879E7C377}" type="datetimeFigureOut">
               <a:rPr lang="de-DE" smtClean="0"/>
-              <a:t>20.05.2026</a:t>
+              <a:t>26.05.2026</a:t>
             </a:fld>
             <a:endParaRPr lang="de-DE"/>
           </a:p>
@@ -913,7 +912,7 @@
           <a:p>
             <a:fld id="{F0E51C7C-CEA3-4CAA-BE4B-344879E7C377}" type="datetimeFigureOut">
               <a:rPr lang="de-DE" smtClean="0"/>
-              <a:t>20.05.2026</a:t>
+              <a:t>26.05.2026</a:t>
             </a:fld>
             <a:endParaRPr lang="de-DE"/>
           </a:p>
@@ -1093,7 +1092,7 @@
           <a:p>
             <a:fld id="{F0E51C7C-CEA3-4CAA-BE4B-344879E7C377}" type="datetimeFigureOut">
               <a:rPr lang="de-DE" smtClean="0"/>
-              <a:t>20.05.2026</a:t>
+              <a:t>26.05.2026</a:t>
             </a:fld>
             <a:endParaRPr lang="de-DE"/>
           </a:p>
@@ -1263,7 +1262,7 @@
           <a:p>
             <a:fld id="{F0E51C7C-CEA3-4CAA-BE4B-344879E7C377}" type="datetimeFigureOut">
               <a:rPr lang="de-DE" smtClean="0"/>
-              <a:t>20.05.2026</a:t>
+              <a:t>26.05.2026</a:t>
             </a:fld>
             <a:endParaRPr lang="de-DE"/>
           </a:p>
@@ -1509,7 +1508,7 @@
           <a:p>
             <a:fld id="{F0E51C7C-CEA3-4CAA-BE4B-344879E7C377}" type="datetimeFigureOut">
               <a:rPr lang="de-DE" smtClean="0"/>
-              <a:t>20.05.2026</a:t>
+              <a:t>26.05.2026</a:t>
             </a:fld>
             <a:endParaRPr lang="de-DE"/>
           </a:p>
@@ -1741,7 +1740,7 @@
           <a:p>
             <a:fld id="{F0E51C7C-CEA3-4CAA-BE4B-344879E7C377}" type="datetimeFigureOut">
               <a:rPr lang="de-DE" smtClean="0"/>
-              <a:t>20.05.2026</a:t>
+              <a:t>26.05.2026</a:t>
             </a:fld>
             <a:endParaRPr lang="de-DE"/>
           </a:p>
@@ -2108,7 +2107,7 @@
           <a:p>
             <a:fld id="{F0E51C7C-CEA3-4CAA-BE4B-344879E7C377}" type="datetimeFigureOut">
               <a:rPr lang="de-DE" smtClean="0"/>
-              <a:t>20.05.2026</a:t>
+              <a:t>26.05.2026</a:t>
             </a:fld>
             <a:endParaRPr lang="de-DE"/>
           </a:p>
@@ -2226,7 +2225,7 @@
           <a:p>
             <a:fld id="{F0E51C7C-CEA3-4CAA-BE4B-344879E7C377}" type="datetimeFigureOut">
               <a:rPr lang="de-DE" smtClean="0"/>
-              <a:t>20.05.2026</a:t>
+              <a:t>26.05.2026</a:t>
             </a:fld>
             <a:endParaRPr lang="de-DE"/>
           </a:p>
@@ -2321,7 +2320,7 @@
           <a:p>
             <a:fld id="{F0E51C7C-CEA3-4CAA-BE4B-344879E7C377}" type="datetimeFigureOut">
               <a:rPr lang="de-DE" smtClean="0"/>
-              <a:t>20.05.2026</a:t>
+              <a:t>26.05.2026</a:t>
             </a:fld>
             <a:endParaRPr lang="de-DE"/>
           </a:p>
@@ -2598,7 +2597,7 @@
           <a:p>
             <a:fld id="{F0E51C7C-CEA3-4CAA-BE4B-344879E7C377}" type="datetimeFigureOut">
               <a:rPr lang="de-DE" smtClean="0"/>
-              <a:t>20.05.2026</a:t>
+              <a:t>26.05.2026</a:t>
             </a:fld>
             <a:endParaRPr lang="de-DE"/>
           </a:p>
@@ -2851,7 +2850,7 @@
           <a:p>
             <a:fld id="{F0E51C7C-CEA3-4CAA-BE4B-344879E7C377}" type="datetimeFigureOut">
               <a:rPr lang="de-DE" smtClean="0"/>
-              <a:t>20.05.2026</a:t>
+              <a:t>26.05.2026</a:t>
             </a:fld>
             <a:endParaRPr lang="de-DE"/>
           </a:p>
@@ -3064,7 +3063,7 @@
           <a:p>
             <a:fld id="{F0E51C7C-CEA3-4CAA-BE4B-344879E7C377}" type="datetimeFigureOut">
               <a:rPr lang="de-DE" smtClean="0"/>
-              <a:t>20.05.2026</a:t>
+              <a:t>26.05.2026</a:t>
             </a:fld>
             <a:endParaRPr lang="de-DE"/>
           </a:p>
@@ -3540,10 +3539,333 @@
       </p:sp>
       <p:sp>
         <p:nvSpPr>
-          <p:cNvPr id="3" name="Retângulo 1">
+          <p:cNvPr id="23" name="CaixaDeTexto 17">
             <a:extLst>
               <a:ext uri="{FF2B5EF4-FFF2-40B4-BE49-F238E27FC236}">
-                <a16:creationId xmlns:a16="http://schemas.microsoft.com/office/drawing/2014/main" id="{F314F01E-F438-79CC-7775-4BBE2B751C77}"/>
+                <a16:creationId xmlns:a16="http://schemas.microsoft.com/office/drawing/2014/main" id="{C0CA1E5A-9F36-C554-24B3-CBDA6372F5F4}"/>
+              </a:ext>
+            </a:extLst>
+          </p:cNvPr>
+          <p:cNvSpPr txBox="1"/>
+          <p:nvPr/>
+        </p:nvSpPr>
+        <p:spPr>
+          <a:xfrm>
+            <a:off x="2104810" y="852212"/>
+            <a:ext cx="9809795" cy="4001095"/>
+          </a:xfrm>
+          <a:prstGeom prst="rect">
+            <a:avLst/>
+          </a:prstGeom>
+          <a:noFill/>
+        </p:spPr>
+        <p:txBody>
+          <a:bodyPr wrap="square" lIns="91440" tIns="45720" rIns="91440" bIns="45720" anchor="t">
+            <a:spAutoFit/>
+          </a:bodyPr>
+          <a:lstStyle/>
+          <a:p>
+            <a:endParaRPr lang="pt-BR" sz="1600" b="1">
+              <a:solidFill>
+                <a:srgbClr val="FF0000"/>
+              </a:solidFill>
+              <a:latin typeface="Poppins"/>
+              <a:ea typeface="Times New Roman" panose="02020603050405020304" pitchFamily="18" charset="0"/>
+              <a:cs typeface="Poppins"/>
+            </a:endParaRPr>
+          </a:p>
+          <a:p>
+            <a:r>
+              <a:rPr lang="pt-BR" sz="1600" b="1">
+                <a:solidFill>
+                  <a:srgbClr val="FF0000"/>
+                </a:solidFill>
+                <a:latin typeface="Poppins"/>
+                <a:ea typeface="Times New Roman" panose="02020603050405020304" pitchFamily="18" charset="0"/>
+                <a:cs typeface="Poppins"/>
+              </a:rPr>
+              <a:t>1. Projeto </a:t>
+            </a:r>
+            <a:r>
+              <a:rPr lang="pt-BR" sz="1600" b="1">
+                <a:solidFill>
+                  <a:srgbClr val="000000"/>
+                </a:solidFill>
+                <a:latin typeface="Poppins"/>
+                <a:ea typeface="Times New Roman" panose="02020603050405020304" pitchFamily="18" charset="0"/>
+                <a:cs typeface="Poppins"/>
+              </a:rPr>
+              <a:t>- {{ sumario }}</a:t>
+            </a:r>
+            <a:endParaRPr lang="pt-BR"/>
+          </a:p>
+          <a:p>
+            <a:pPr lvl="0">
+              <a:lnSpc>
+                <a:spcPct val="250000"/>
+              </a:lnSpc>
+            </a:pPr>
+            <a:r>
+              <a:rPr lang="pt-BR" sz="1600" b="1">
+                <a:solidFill>
+                  <a:srgbClr val="FF0000"/>
+                </a:solidFill>
+                <a:latin typeface="Poppins" panose="00000500000000000000" pitchFamily="2" charset="0"/>
+                <a:ea typeface="Times New Roman" panose="02020603050405020304" pitchFamily="18" charset="0"/>
+                <a:cs typeface="Poppins" panose="00000500000000000000" pitchFamily="2" charset="0"/>
+              </a:rPr>
+              <a:t>2. Investimento</a:t>
+            </a:r>
+          </a:p>
+          <a:p>
+            <a:pPr lvl="0"/>
+            <a:endParaRPr lang="pt-BR" sz="1400" b="1">
+              <a:solidFill>
+                <a:srgbClr val="FF0000"/>
+              </a:solidFill>
+              <a:latin typeface="Poppins" panose="00000500000000000000" pitchFamily="2" charset="0"/>
+              <a:ea typeface="Times New Roman" panose="02020603050405020304" pitchFamily="18" charset="0"/>
+              <a:cs typeface="Poppins" panose="00000500000000000000" pitchFamily="2" charset="0"/>
+            </a:endParaRPr>
+          </a:p>
+          <a:p>
+            <a:pPr lvl="0"/>
+            <a:r>
+              <a:rPr lang="pt-BR" sz="1600" b="1">
+                <a:solidFill>
+                  <a:srgbClr val="FF0000"/>
+                </a:solidFill>
+                <a:effectLst/>
+                <a:latin typeface="Poppins" panose="00000500000000000000" pitchFamily="2" charset="0"/>
+                <a:ea typeface="Times New Roman" panose="02020603050405020304" pitchFamily="18" charset="0"/>
+                <a:cs typeface="Poppins" panose="00000500000000000000" pitchFamily="2" charset="0"/>
+              </a:rPr>
+              <a:t>3. Condições de Pagamento</a:t>
+            </a:r>
+          </a:p>
+          <a:p>
+            <a:pPr lvl="0"/>
+            <a:endParaRPr lang="pt-BR" sz="1400" b="1">
+              <a:solidFill>
+                <a:srgbClr val="FF0000"/>
+              </a:solidFill>
+              <a:latin typeface="Poppins" panose="00000500000000000000" pitchFamily="2" charset="0"/>
+              <a:ea typeface="Times New Roman" panose="02020603050405020304" pitchFamily="18" charset="0"/>
+              <a:cs typeface="Poppins" panose="00000500000000000000" pitchFamily="2" charset="0"/>
+            </a:endParaRPr>
+          </a:p>
+          <a:p>
+            <a:pPr lvl="0"/>
+            <a:r>
+              <a:rPr lang="pt-BR" sz="1600" b="1">
+                <a:solidFill>
+                  <a:srgbClr val="FF0000"/>
+                </a:solidFill>
+                <a:effectLst/>
+                <a:latin typeface="Poppins" panose="00000500000000000000" pitchFamily="2" charset="0"/>
+                <a:ea typeface="Times New Roman" panose="02020603050405020304" pitchFamily="18" charset="0"/>
+                <a:cs typeface="Poppins" panose="00000500000000000000" pitchFamily="2" charset="0"/>
+              </a:rPr>
+              <a:t>4. Prazos</a:t>
+            </a:r>
+          </a:p>
+          <a:p>
+            <a:pPr lvl="0"/>
+            <a:endParaRPr lang="pt-BR" sz="1400" b="1">
+              <a:solidFill>
+                <a:srgbClr val="FF0000"/>
+              </a:solidFill>
+              <a:latin typeface="Poppins" panose="00000500000000000000" pitchFamily="2" charset="0"/>
+              <a:ea typeface="Times New Roman" panose="02020603050405020304" pitchFamily="18" charset="0"/>
+              <a:cs typeface="Poppins" panose="00000500000000000000" pitchFamily="2" charset="0"/>
+            </a:endParaRPr>
+          </a:p>
+          <a:p>
+            <a:pPr lvl="0"/>
+            <a:r>
+              <a:rPr lang="pt-BR" sz="1600" b="1">
+                <a:solidFill>
+                  <a:srgbClr val="FF0000"/>
+                </a:solidFill>
+                <a:effectLst/>
+                <a:latin typeface="Poppins" panose="00000500000000000000" pitchFamily="2" charset="0"/>
+                <a:ea typeface="Times New Roman" panose="02020603050405020304" pitchFamily="18" charset="0"/>
+                <a:cs typeface="Poppins" panose="00000500000000000000" pitchFamily="2" charset="0"/>
+              </a:rPr>
+              <a:t>5. Garantia</a:t>
+            </a:r>
+          </a:p>
+          <a:p>
+            <a:pPr lvl="0"/>
+            <a:endParaRPr lang="pt-BR" sz="1600" b="1">
+              <a:solidFill>
+                <a:srgbClr val="FF0000"/>
+              </a:solidFill>
+              <a:effectLst/>
+              <a:latin typeface="Poppins" panose="00000500000000000000" pitchFamily="2" charset="0"/>
+              <a:ea typeface="Times New Roman" panose="02020603050405020304" pitchFamily="18" charset="0"/>
+              <a:cs typeface="Poppins" panose="00000500000000000000" pitchFamily="2" charset="0"/>
+            </a:endParaRPr>
+          </a:p>
+          <a:p>
+            <a:pPr lvl="0"/>
+            <a:r>
+              <a:rPr lang="pt-BR" sz="1600" b="1">
+                <a:solidFill>
+                  <a:srgbClr val="FF0000"/>
+                </a:solidFill>
+                <a:latin typeface="Poppins" panose="00000500000000000000" pitchFamily="2" charset="0"/>
+                <a:ea typeface="Times New Roman" panose="02020603050405020304" pitchFamily="18" charset="0"/>
+                <a:cs typeface="Poppins" panose="00000500000000000000" pitchFamily="2" charset="0"/>
+              </a:rPr>
+              <a:t>6</a:t>
+            </a:r>
+            <a:r>
+              <a:rPr lang="pt-BR" sz="1600" b="1">
+                <a:solidFill>
+                  <a:srgbClr val="FF0000"/>
+                </a:solidFill>
+                <a:effectLst/>
+                <a:latin typeface="Poppins" panose="00000500000000000000" pitchFamily="2" charset="0"/>
+                <a:ea typeface="Times New Roman" panose="02020603050405020304" pitchFamily="18" charset="0"/>
+                <a:cs typeface="Poppins" panose="00000500000000000000" pitchFamily="2" charset="0"/>
+              </a:rPr>
+              <a:t>. Responsabilidades da Contratada</a:t>
+            </a:r>
+          </a:p>
+          <a:p>
+            <a:pPr lvl="0"/>
+            <a:endParaRPr lang="pt-BR" sz="1400" b="1">
+              <a:solidFill>
+                <a:srgbClr val="FF0000"/>
+              </a:solidFill>
+              <a:effectLst/>
+              <a:latin typeface="Poppins" panose="00000500000000000000" pitchFamily="2" charset="0"/>
+              <a:ea typeface="Times New Roman" panose="02020603050405020304" pitchFamily="18" charset="0"/>
+              <a:cs typeface="Poppins" panose="00000500000000000000" pitchFamily="2" charset="0"/>
+            </a:endParaRPr>
+          </a:p>
+          <a:p>
+            <a:pPr lvl="0"/>
+            <a:r>
+              <a:rPr lang="pt-BR" sz="1600" b="1">
+                <a:solidFill>
+                  <a:srgbClr val="FF0000"/>
+                </a:solidFill>
+                <a:latin typeface="Poppins" panose="00000500000000000000" pitchFamily="2" charset="0"/>
+                <a:ea typeface="Times New Roman" panose="02020603050405020304" pitchFamily="18" charset="0"/>
+                <a:cs typeface="Poppins" panose="00000500000000000000" pitchFamily="2" charset="0"/>
+              </a:rPr>
+              <a:t>7</a:t>
+            </a:r>
+            <a:r>
+              <a:rPr lang="pt-BR" sz="1600" b="1">
+                <a:solidFill>
+                  <a:srgbClr val="FF0000"/>
+                </a:solidFill>
+                <a:effectLst/>
+                <a:latin typeface="Poppins" panose="00000500000000000000" pitchFamily="2" charset="0"/>
+                <a:ea typeface="Times New Roman" panose="02020603050405020304" pitchFamily="18" charset="0"/>
+                <a:cs typeface="Poppins" panose="00000500000000000000" pitchFamily="2" charset="0"/>
+              </a:rPr>
+              <a:t>. Responsabilidades do Contratante</a:t>
+            </a:r>
+          </a:p>
+          <a:p>
+            <a:pPr lvl="0"/>
+            <a:endParaRPr lang="pt-BR" sz="1400" b="1">
+              <a:solidFill>
+                <a:srgbClr val="FF0000"/>
+              </a:solidFill>
+              <a:latin typeface="Poppins" panose="00000500000000000000" pitchFamily="2" charset="0"/>
+              <a:ea typeface="Times New Roman" panose="02020603050405020304" pitchFamily="18" charset="0"/>
+              <a:cs typeface="Poppins" panose="00000500000000000000" pitchFamily="2" charset="0"/>
+            </a:endParaRPr>
+          </a:p>
+          <a:p>
+            <a:r>
+              <a:rPr lang="pt-BR" sz="1600" b="1">
+                <a:solidFill>
+                  <a:srgbClr val="FF0000"/>
+                </a:solidFill>
+                <a:latin typeface="Poppins" panose="00000500000000000000" pitchFamily="2" charset="0"/>
+                <a:ea typeface="Times New Roman" panose="02020603050405020304" pitchFamily="18" charset="0"/>
+                <a:cs typeface="Poppins" panose="00000500000000000000" pitchFamily="2" charset="0"/>
+              </a:rPr>
+              <a:t>8</a:t>
+            </a:r>
+            <a:r>
+              <a:rPr lang="pt-BR" sz="1600" b="1">
+                <a:solidFill>
+                  <a:srgbClr val="FF0000"/>
+                </a:solidFill>
+                <a:effectLst/>
+                <a:latin typeface="Poppins" panose="00000500000000000000" pitchFamily="2" charset="0"/>
+                <a:ea typeface="Times New Roman" panose="02020603050405020304" pitchFamily="18" charset="0"/>
+                <a:cs typeface="Poppins" panose="00000500000000000000" pitchFamily="2" charset="0"/>
+              </a:rPr>
+              <a:t>. Considerações Gerais</a:t>
+            </a:r>
+          </a:p>
+        </p:txBody>
+      </p:sp>
+      <p:sp>
+        <p:nvSpPr>
+          <p:cNvPr id="31" name="CaixaDeTexto 15">
+            <a:extLst>
+              <a:ext uri="{FF2B5EF4-FFF2-40B4-BE49-F238E27FC236}">
+                <a16:creationId xmlns:a16="http://schemas.microsoft.com/office/drawing/2014/main" id="{5B7FCF8A-1C73-1893-254C-F8C34FD1384B}"/>
+              </a:ext>
+            </a:extLst>
+          </p:cNvPr>
+          <p:cNvSpPr txBox="1"/>
+          <p:nvPr/>
+        </p:nvSpPr>
+        <p:spPr>
+          <a:xfrm>
+            <a:off x="2104811" y="317431"/>
+            <a:ext cx="2847132" cy="584775"/>
+          </a:xfrm>
+          <a:prstGeom prst="rect">
+            <a:avLst/>
+          </a:prstGeom>
+          <a:noFill/>
+        </p:spPr>
+        <p:txBody>
+          <a:bodyPr wrap="square">
+            <a:spAutoFit/>
+          </a:bodyPr>
+          <a:lstStyle/>
+          <a:p>
+            <a:pPr>
+              <a:defRPr/>
+            </a:pPr>
+            <a:r>
+              <a:rPr lang="pt-BR" sz="3200" b="1">
+                <a:solidFill>
+                  <a:srgbClr val="FF0000"/>
+                </a:solidFill>
+                <a:latin typeface="Poppins Bold" panose="00000800000000000000" pitchFamily="2" charset="0"/>
+                <a:cs typeface="Poppins Bold" panose="00000800000000000000" pitchFamily="2" charset="0"/>
+              </a:rPr>
+              <a:t>Sumário</a:t>
+            </a:r>
+            <a:endParaRPr lang="pt-BR" sz="2800" b="1">
+              <a:solidFill>
+                <a:srgbClr val="FF0000"/>
+              </a:solidFill>
+              <a:latin typeface="Poppins Bold" panose="00000800000000000000" pitchFamily="2" charset="0"/>
+              <a:cs typeface="Poppins Bold" panose="00000800000000000000" pitchFamily="2" charset="0"/>
+            </a:endParaRPr>
+          </a:p>
+        </p:txBody>
+      </p:sp>
+      <p:sp>
+        <p:nvSpPr>
+          <p:cNvPr id="4" name="Retângulo 3">
+            <a:extLst>
+              <a:ext uri="{FF2B5EF4-FFF2-40B4-BE49-F238E27FC236}">
+                <a16:creationId xmlns:a16="http://schemas.microsoft.com/office/drawing/2014/main" id="{57C794CD-198E-483B-C773-A70F811F0012}"/>
               </a:ext>
             </a:extLst>
           </p:cNvPr>
@@ -3585,7 +3907,101 @@
         </p:style>
         <p:txBody>
           <a:bodyPr rtlCol="0" anchor="ctr"/>
-          <a:lstStyle/>
+          <a:lstStyle>
+            <a:defPPr>
+              <a:defRPr lang="en-US"/>
+            </a:defPPr>
+            <a:lvl1pPr marL="0" algn="l" defTabSz="457200" rtl="0" eaLnBrk="1" latinLnBrk="0" hangingPunct="1">
+              <a:defRPr sz="1800" kern="1200">
+                <a:solidFill>
+                  <a:schemeClr val="lt1"/>
+                </a:solidFill>
+                <a:latin typeface="+mn-lt"/>
+                <a:ea typeface="+mn-ea"/>
+                <a:cs typeface="+mn-cs"/>
+              </a:defRPr>
+            </a:lvl1pPr>
+            <a:lvl2pPr marL="457200" algn="l" defTabSz="457200" rtl="0" eaLnBrk="1" latinLnBrk="0" hangingPunct="1">
+              <a:defRPr sz="1800" kern="1200">
+                <a:solidFill>
+                  <a:schemeClr val="lt1"/>
+                </a:solidFill>
+                <a:latin typeface="+mn-lt"/>
+                <a:ea typeface="+mn-ea"/>
+                <a:cs typeface="+mn-cs"/>
+              </a:defRPr>
+            </a:lvl2pPr>
+            <a:lvl3pPr marL="914400" algn="l" defTabSz="457200" rtl="0" eaLnBrk="1" latinLnBrk="0" hangingPunct="1">
+              <a:defRPr sz="1800" kern="1200">
+                <a:solidFill>
+                  <a:schemeClr val="lt1"/>
+                </a:solidFill>
+                <a:latin typeface="+mn-lt"/>
+                <a:ea typeface="+mn-ea"/>
+                <a:cs typeface="+mn-cs"/>
+              </a:defRPr>
+            </a:lvl3pPr>
+            <a:lvl4pPr marL="1371600" algn="l" defTabSz="457200" rtl="0" eaLnBrk="1" latinLnBrk="0" hangingPunct="1">
+              <a:defRPr sz="1800" kern="1200">
+                <a:solidFill>
+                  <a:schemeClr val="lt1"/>
+                </a:solidFill>
+                <a:latin typeface="+mn-lt"/>
+                <a:ea typeface="+mn-ea"/>
+                <a:cs typeface="+mn-cs"/>
+              </a:defRPr>
+            </a:lvl4pPr>
+            <a:lvl5pPr marL="1828800" algn="l" defTabSz="457200" rtl="0" eaLnBrk="1" latinLnBrk="0" hangingPunct="1">
+              <a:defRPr sz="1800" kern="1200">
+                <a:solidFill>
+                  <a:schemeClr val="lt1"/>
+                </a:solidFill>
+                <a:latin typeface="+mn-lt"/>
+                <a:ea typeface="+mn-ea"/>
+                <a:cs typeface="+mn-cs"/>
+              </a:defRPr>
+            </a:lvl5pPr>
+            <a:lvl6pPr marL="2286000" algn="l" defTabSz="457200" rtl="0" eaLnBrk="1" latinLnBrk="0" hangingPunct="1">
+              <a:defRPr sz="1800" kern="1200">
+                <a:solidFill>
+                  <a:schemeClr val="lt1"/>
+                </a:solidFill>
+                <a:latin typeface="+mn-lt"/>
+                <a:ea typeface="+mn-ea"/>
+                <a:cs typeface="+mn-cs"/>
+              </a:defRPr>
+            </a:lvl6pPr>
+            <a:lvl7pPr marL="2743200" algn="l" defTabSz="457200" rtl="0" eaLnBrk="1" latinLnBrk="0" hangingPunct="1">
+              <a:defRPr sz="1800" kern="1200">
+                <a:solidFill>
+                  <a:schemeClr val="lt1"/>
+                </a:solidFill>
+                <a:latin typeface="+mn-lt"/>
+                <a:ea typeface="+mn-ea"/>
+                <a:cs typeface="+mn-cs"/>
+              </a:defRPr>
+            </a:lvl7pPr>
+            <a:lvl8pPr marL="3200400" algn="l" defTabSz="457200" rtl="0" eaLnBrk="1" latinLnBrk="0" hangingPunct="1">
+              <a:defRPr sz="1800" kern="1200">
+                <a:solidFill>
+                  <a:schemeClr val="lt1"/>
+                </a:solidFill>
+                <a:latin typeface="+mn-lt"/>
+                <a:ea typeface="+mn-ea"/>
+                <a:cs typeface="+mn-cs"/>
+              </a:defRPr>
+            </a:lvl8pPr>
+            <a:lvl9pPr marL="3657600" algn="l" defTabSz="457200" rtl="0" eaLnBrk="1" latinLnBrk="0" hangingPunct="1">
+              <a:defRPr sz="1800" kern="1200">
+                <a:solidFill>
+                  <a:schemeClr val="lt1"/>
+                </a:solidFill>
+                <a:latin typeface="+mn-lt"/>
+                <a:ea typeface="+mn-ea"/>
+                <a:cs typeface="+mn-cs"/>
+              </a:defRPr>
+            </a:lvl9pPr>
+          </a:lstStyle>
           <a:p>
             <a:pPr marL="0" marR="0" lvl="0" indent="0" algn="ctr" defTabSz="914400" rtl="0" eaLnBrk="1" fontAlgn="auto" latinLnBrk="0" hangingPunct="1">
               <a:lnSpc>
@@ -3621,12 +4037,1360 @@
           </a:p>
         </p:txBody>
       </p:sp>
+      <p:sp>
+        <p:nvSpPr>
+          <p:cNvPr id="5" name="CaixaDeTexto 1">
+            <a:extLst>
+              <a:ext uri="{FF2B5EF4-FFF2-40B4-BE49-F238E27FC236}">
+                <a16:creationId xmlns:a16="http://schemas.microsoft.com/office/drawing/2014/main" id="{704E3E7C-16D0-F8AF-0BC6-C16CCD5FE8A8}"/>
+              </a:ext>
+            </a:extLst>
+          </p:cNvPr>
+          <p:cNvSpPr txBox="1"/>
+          <p:nvPr/>
+        </p:nvSpPr>
+        <p:spPr>
+          <a:xfrm>
+            <a:off x="39778" y="4431263"/>
+            <a:ext cx="1063214" cy="685059"/>
+          </a:xfrm>
+          <a:prstGeom prst="rect">
+            <a:avLst/>
+          </a:prstGeom>
+          <a:noFill/>
+        </p:spPr>
+        <p:txBody>
+          <a:bodyPr wrap="square" lIns="91440" tIns="45720" rIns="91440" bIns="45720" rtlCol="0" anchor="t">
+            <a:spAutoFit/>
+          </a:bodyPr>
+          <a:lstStyle>
+            <a:defPPr>
+              <a:defRPr lang="en-US"/>
+            </a:defPPr>
+            <a:lvl1pPr marL="0" algn="l" defTabSz="457200" rtl="0" eaLnBrk="1" latinLnBrk="0" hangingPunct="1">
+              <a:defRPr sz="1800" kern="1200">
+                <a:solidFill>
+                  <a:schemeClr val="tx1"/>
+                </a:solidFill>
+                <a:latin typeface="+mn-lt"/>
+                <a:ea typeface="+mn-ea"/>
+                <a:cs typeface="+mn-cs"/>
+              </a:defRPr>
+            </a:lvl1pPr>
+            <a:lvl2pPr marL="457200" algn="l" defTabSz="457200" rtl="0" eaLnBrk="1" latinLnBrk="0" hangingPunct="1">
+              <a:defRPr sz="1800" kern="1200">
+                <a:solidFill>
+                  <a:schemeClr val="tx1"/>
+                </a:solidFill>
+                <a:latin typeface="+mn-lt"/>
+                <a:ea typeface="+mn-ea"/>
+                <a:cs typeface="+mn-cs"/>
+              </a:defRPr>
+            </a:lvl2pPr>
+            <a:lvl3pPr marL="914400" algn="l" defTabSz="457200" rtl="0" eaLnBrk="1" latinLnBrk="0" hangingPunct="1">
+              <a:defRPr sz="1800" kern="1200">
+                <a:solidFill>
+                  <a:schemeClr val="tx1"/>
+                </a:solidFill>
+                <a:latin typeface="+mn-lt"/>
+                <a:ea typeface="+mn-ea"/>
+                <a:cs typeface="+mn-cs"/>
+              </a:defRPr>
+            </a:lvl3pPr>
+            <a:lvl4pPr marL="1371600" algn="l" defTabSz="457200" rtl="0" eaLnBrk="1" latinLnBrk="0" hangingPunct="1">
+              <a:defRPr sz="1800" kern="1200">
+                <a:solidFill>
+                  <a:schemeClr val="tx1"/>
+                </a:solidFill>
+                <a:latin typeface="+mn-lt"/>
+                <a:ea typeface="+mn-ea"/>
+                <a:cs typeface="+mn-cs"/>
+              </a:defRPr>
+            </a:lvl4pPr>
+            <a:lvl5pPr marL="1828800" algn="l" defTabSz="457200" rtl="0" eaLnBrk="1" latinLnBrk="0" hangingPunct="1">
+              <a:defRPr sz="1800" kern="1200">
+                <a:solidFill>
+                  <a:schemeClr val="tx1"/>
+                </a:solidFill>
+                <a:latin typeface="+mn-lt"/>
+                <a:ea typeface="+mn-ea"/>
+                <a:cs typeface="+mn-cs"/>
+              </a:defRPr>
+            </a:lvl5pPr>
+            <a:lvl6pPr marL="2286000" algn="l" defTabSz="457200" rtl="0" eaLnBrk="1" latinLnBrk="0" hangingPunct="1">
+              <a:defRPr sz="1800" kern="1200">
+                <a:solidFill>
+                  <a:schemeClr val="tx1"/>
+                </a:solidFill>
+                <a:latin typeface="+mn-lt"/>
+                <a:ea typeface="+mn-ea"/>
+                <a:cs typeface="+mn-cs"/>
+              </a:defRPr>
+            </a:lvl6pPr>
+            <a:lvl7pPr marL="2743200" algn="l" defTabSz="457200" rtl="0" eaLnBrk="1" latinLnBrk="0" hangingPunct="1">
+              <a:defRPr sz="1800" kern="1200">
+                <a:solidFill>
+                  <a:schemeClr val="tx1"/>
+                </a:solidFill>
+                <a:latin typeface="+mn-lt"/>
+                <a:ea typeface="+mn-ea"/>
+                <a:cs typeface="+mn-cs"/>
+              </a:defRPr>
+            </a:lvl7pPr>
+            <a:lvl8pPr marL="3200400" algn="l" defTabSz="457200" rtl="0" eaLnBrk="1" latinLnBrk="0" hangingPunct="1">
+              <a:defRPr sz="1800" kern="1200">
+                <a:solidFill>
+                  <a:schemeClr val="tx1"/>
+                </a:solidFill>
+                <a:latin typeface="+mn-lt"/>
+                <a:ea typeface="+mn-ea"/>
+                <a:cs typeface="+mn-cs"/>
+              </a:defRPr>
+            </a:lvl8pPr>
+            <a:lvl9pPr marL="3657600" algn="l" defTabSz="457200" rtl="0" eaLnBrk="1" latinLnBrk="0" hangingPunct="1">
+              <a:defRPr sz="1800" kern="1200">
+                <a:solidFill>
+                  <a:schemeClr val="tx1"/>
+                </a:solidFill>
+                <a:latin typeface="+mn-lt"/>
+                <a:ea typeface="+mn-ea"/>
+                <a:cs typeface="+mn-cs"/>
+              </a:defRPr>
+            </a:lvl9pPr>
+          </a:lstStyle>
+          <a:p>
+            <a:pPr algn="just">
+              <a:lnSpc>
+                <a:spcPct val="150000"/>
+              </a:lnSpc>
+            </a:pPr>
+            <a:r>
+              <a:rPr lang="pt-BR" sz="1300">
+                <a:solidFill>
+                  <a:schemeClr val="bg1"/>
+                </a:solidFill>
+                <a:latin typeface="Poppins" pitchFamily="2" charset="77"/>
+                <a:cs typeface="Poppins" pitchFamily="2" charset="77"/>
+              </a:rPr>
+              <a:t>Proposta</a:t>
+            </a:r>
+          </a:p>
+          <a:p>
+            <a:pPr algn="just">
+              <a:lnSpc>
+                <a:spcPct val="150000"/>
+              </a:lnSpc>
+            </a:pPr>
+            <a:r>
+              <a:rPr lang="pt-BR" sz="1400" b="1">
+                <a:solidFill>
+                  <a:schemeClr val="bg1"/>
+                </a:solidFill>
+                <a:latin typeface="Poppins"/>
+                <a:cs typeface="Poppins"/>
+              </a:rPr>
+              <a:t>{{</a:t>
+            </a:r>
+            <a:r>
+              <a:rPr lang="pt-BR" sz="1400" b="1" err="1">
+                <a:solidFill>
+                  <a:schemeClr val="bg1"/>
+                </a:solidFill>
+                <a:latin typeface="Poppins"/>
+                <a:cs typeface="Poppins"/>
+              </a:rPr>
+              <a:t>np</a:t>
+            </a:r>
+            <a:r>
+              <a:rPr lang="pt-BR" sz="1400" b="1">
+                <a:solidFill>
+                  <a:schemeClr val="bg1"/>
+                </a:solidFill>
+                <a:latin typeface="Poppins"/>
+                <a:cs typeface="Poppins"/>
+              </a:rPr>
+              <a:t>}}</a:t>
+            </a:r>
+            <a:endParaRPr lang="pt-BR" sz="1400" b="1">
+              <a:solidFill>
+                <a:schemeClr val="bg1"/>
+              </a:solidFill>
+              <a:latin typeface="Poppins" pitchFamily="2" charset="77"/>
+              <a:cs typeface="Poppins" pitchFamily="2" charset="77"/>
+            </a:endParaRPr>
+          </a:p>
+        </p:txBody>
+      </p:sp>
+      <p:sp>
+        <p:nvSpPr>
+          <p:cNvPr id="6" name="CaixaDeTexto 1">
+            <a:extLst>
+              <a:ext uri="{FF2B5EF4-FFF2-40B4-BE49-F238E27FC236}">
+                <a16:creationId xmlns:a16="http://schemas.microsoft.com/office/drawing/2014/main" id="{51F9E1A7-30A1-4A82-90B8-CA0EEAF1C43D}"/>
+              </a:ext>
+            </a:extLst>
+          </p:cNvPr>
+          <p:cNvSpPr txBox="1"/>
+          <p:nvPr/>
+        </p:nvSpPr>
+        <p:spPr>
+          <a:xfrm>
+            <a:off x="39778" y="5231827"/>
+            <a:ext cx="1239132" cy="688650"/>
+          </a:xfrm>
+          <a:prstGeom prst="rect">
+            <a:avLst/>
+          </a:prstGeom>
+          <a:noFill/>
+        </p:spPr>
+        <p:txBody>
+          <a:bodyPr wrap="square" lIns="91440" tIns="45720" rIns="91440" bIns="45720" rtlCol="0" anchor="t">
+            <a:spAutoFit/>
+          </a:bodyPr>
+          <a:lstStyle>
+            <a:defPPr>
+              <a:defRPr lang="en-US"/>
+            </a:defPPr>
+            <a:lvl1pPr marL="0" algn="l" defTabSz="457200" rtl="0" eaLnBrk="1" latinLnBrk="0" hangingPunct="1">
+              <a:defRPr sz="1800" kern="1200">
+                <a:solidFill>
+                  <a:schemeClr val="tx1"/>
+                </a:solidFill>
+                <a:latin typeface="+mn-lt"/>
+                <a:ea typeface="+mn-ea"/>
+                <a:cs typeface="+mn-cs"/>
+              </a:defRPr>
+            </a:lvl1pPr>
+            <a:lvl2pPr marL="457200" algn="l" defTabSz="457200" rtl="0" eaLnBrk="1" latinLnBrk="0" hangingPunct="1">
+              <a:defRPr sz="1800" kern="1200">
+                <a:solidFill>
+                  <a:schemeClr val="tx1"/>
+                </a:solidFill>
+                <a:latin typeface="+mn-lt"/>
+                <a:ea typeface="+mn-ea"/>
+                <a:cs typeface="+mn-cs"/>
+              </a:defRPr>
+            </a:lvl2pPr>
+            <a:lvl3pPr marL="914400" algn="l" defTabSz="457200" rtl="0" eaLnBrk="1" latinLnBrk="0" hangingPunct="1">
+              <a:defRPr sz="1800" kern="1200">
+                <a:solidFill>
+                  <a:schemeClr val="tx1"/>
+                </a:solidFill>
+                <a:latin typeface="+mn-lt"/>
+                <a:ea typeface="+mn-ea"/>
+                <a:cs typeface="+mn-cs"/>
+              </a:defRPr>
+            </a:lvl3pPr>
+            <a:lvl4pPr marL="1371600" algn="l" defTabSz="457200" rtl="0" eaLnBrk="1" latinLnBrk="0" hangingPunct="1">
+              <a:defRPr sz="1800" kern="1200">
+                <a:solidFill>
+                  <a:schemeClr val="tx1"/>
+                </a:solidFill>
+                <a:latin typeface="+mn-lt"/>
+                <a:ea typeface="+mn-ea"/>
+                <a:cs typeface="+mn-cs"/>
+              </a:defRPr>
+            </a:lvl4pPr>
+            <a:lvl5pPr marL="1828800" algn="l" defTabSz="457200" rtl="0" eaLnBrk="1" latinLnBrk="0" hangingPunct="1">
+              <a:defRPr sz="1800" kern="1200">
+                <a:solidFill>
+                  <a:schemeClr val="tx1"/>
+                </a:solidFill>
+                <a:latin typeface="+mn-lt"/>
+                <a:ea typeface="+mn-ea"/>
+                <a:cs typeface="+mn-cs"/>
+              </a:defRPr>
+            </a:lvl5pPr>
+            <a:lvl6pPr marL="2286000" algn="l" defTabSz="457200" rtl="0" eaLnBrk="1" latinLnBrk="0" hangingPunct="1">
+              <a:defRPr sz="1800" kern="1200">
+                <a:solidFill>
+                  <a:schemeClr val="tx1"/>
+                </a:solidFill>
+                <a:latin typeface="+mn-lt"/>
+                <a:ea typeface="+mn-ea"/>
+                <a:cs typeface="+mn-cs"/>
+              </a:defRPr>
+            </a:lvl6pPr>
+            <a:lvl7pPr marL="2743200" algn="l" defTabSz="457200" rtl="0" eaLnBrk="1" latinLnBrk="0" hangingPunct="1">
+              <a:defRPr sz="1800" kern="1200">
+                <a:solidFill>
+                  <a:schemeClr val="tx1"/>
+                </a:solidFill>
+                <a:latin typeface="+mn-lt"/>
+                <a:ea typeface="+mn-ea"/>
+                <a:cs typeface="+mn-cs"/>
+              </a:defRPr>
+            </a:lvl7pPr>
+            <a:lvl8pPr marL="3200400" algn="l" defTabSz="457200" rtl="0" eaLnBrk="1" latinLnBrk="0" hangingPunct="1">
+              <a:defRPr sz="1800" kern="1200">
+                <a:solidFill>
+                  <a:schemeClr val="tx1"/>
+                </a:solidFill>
+                <a:latin typeface="+mn-lt"/>
+                <a:ea typeface="+mn-ea"/>
+                <a:cs typeface="+mn-cs"/>
+              </a:defRPr>
+            </a:lvl8pPr>
+            <a:lvl9pPr marL="3657600" algn="l" defTabSz="457200" rtl="0" eaLnBrk="1" latinLnBrk="0" hangingPunct="1">
+              <a:defRPr sz="1800" kern="1200">
+                <a:solidFill>
+                  <a:schemeClr val="tx1"/>
+                </a:solidFill>
+                <a:latin typeface="+mn-lt"/>
+                <a:ea typeface="+mn-ea"/>
+                <a:cs typeface="+mn-cs"/>
+              </a:defRPr>
+            </a:lvl9pPr>
+          </a:lstStyle>
+          <a:p>
+            <a:pPr algn="just">
+              <a:lnSpc>
+                <a:spcPct val="150000"/>
+              </a:lnSpc>
+            </a:pPr>
+            <a:r>
+              <a:rPr lang="pt-BR" sz="1300">
+                <a:solidFill>
+                  <a:schemeClr val="bg1"/>
+                </a:solidFill>
+                <a:latin typeface="Poppins" pitchFamily="2" charset="77"/>
+                <a:cs typeface="Poppins" pitchFamily="2" charset="77"/>
+              </a:rPr>
+              <a:t>Solicitação</a:t>
+            </a:r>
+          </a:p>
+          <a:p>
+            <a:pPr algn="just">
+              <a:lnSpc>
+                <a:spcPct val="150000"/>
+              </a:lnSpc>
+            </a:pPr>
+            <a:r>
+              <a:rPr lang="pt-BR" sz="1400" b="1">
+                <a:solidFill>
+                  <a:schemeClr val="bg1"/>
+                </a:solidFill>
+                <a:latin typeface="Poppins"/>
+                <a:cs typeface="Poppins"/>
+              </a:rPr>
+              <a:t>{{</a:t>
+            </a:r>
+            <a:r>
+              <a:rPr lang="pt-BR" sz="1400" b="1" err="1">
+                <a:solidFill>
+                  <a:schemeClr val="bg1"/>
+                </a:solidFill>
+                <a:latin typeface="Poppins"/>
+                <a:cs typeface="Poppins"/>
+              </a:rPr>
+              <a:t>ds</a:t>
+            </a:r>
+            <a:r>
+              <a:rPr lang="pt-BR" sz="1400" b="1">
+                <a:solidFill>
+                  <a:schemeClr val="bg1"/>
+                </a:solidFill>
+                <a:latin typeface="Poppins"/>
+                <a:cs typeface="Poppins"/>
+              </a:rPr>
+              <a:t>}}</a:t>
+            </a:r>
+            <a:endParaRPr lang="pt-BR" sz="1400" b="1">
+              <a:solidFill>
+                <a:schemeClr val="bg1"/>
+              </a:solidFill>
+              <a:latin typeface="Poppins" pitchFamily="2" charset="77"/>
+              <a:cs typeface="Poppins" pitchFamily="2" charset="77"/>
+            </a:endParaRPr>
+          </a:p>
+        </p:txBody>
+      </p:sp>
+      <p:sp>
+        <p:nvSpPr>
+          <p:cNvPr id="9" name="CaixaDeTexto 1">
+            <a:extLst>
+              <a:ext uri="{FF2B5EF4-FFF2-40B4-BE49-F238E27FC236}">
+                <a16:creationId xmlns:a16="http://schemas.microsoft.com/office/drawing/2014/main" id="{ECC26BC3-322D-E73D-F9CD-1F6646F05552}"/>
+              </a:ext>
+            </a:extLst>
+          </p:cNvPr>
+          <p:cNvSpPr txBox="1"/>
+          <p:nvPr/>
+        </p:nvSpPr>
+        <p:spPr>
+          <a:xfrm>
+            <a:off x="39778" y="6032391"/>
+            <a:ext cx="1239132" cy="688650"/>
+          </a:xfrm>
+          <a:prstGeom prst="rect">
+            <a:avLst/>
+          </a:prstGeom>
+          <a:noFill/>
+        </p:spPr>
+        <p:txBody>
+          <a:bodyPr wrap="square" lIns="91440" tIns="45720" rIns="91440" bIns="45720" rtlCol="0" anchor="t">
+            <a:spAutoFit/>
+          </a:bodyPr>
+          <a:lstStyle>
+            <a:defPPr>
+              <a:defRPr lang="en-US"/>
+            </a:defPPr>
+            <a:lvl1pPr marL="0" algn="l" defTabSz="457200" rtl="0" eaLnBrk="1" latinLnBrk="0" hangingPunct="1">
+              <a:defRPr sz="1800" kern="1200">
+                <a:solidFill>
+                  <a:schemeClr val="tx1"/>
+                </a:solidFill>
+                <a:latin typeface="+mn-lt"/>
+                <a:ea typeface="+mn-ea"/>
+                <a:cs typeface="+mn-cs"/>
+              </a:defRPr>
+            </a:lvl1pPr>
+            <a:lvl2pPr marL="457200" algn="l" defTabSz="457200" rtl="0" eaLnBrk="1" latinLnBrk="0" hangingPunct="1">
+              <a:defRPr sz="1800" kern="1200">
+                <a:solidFill>
+                  <a:schemeClr val="tx1"/>
+                </a:solidFill>
+                <a:latin typeface="+mn-lt"/>
+                <a:ea typeface="+mn-ea"/>
+                <a:cs typeface="+mn-cs"/>
+              </a:defRPr>
+            </a:lvl2pPr>
+            <a:lvl3pPr marL="914400" algn="l" defTabSz="457200" rtl="0" eaLnBrk="1" latinLnBrk="0" hangingPunct="1">
+              <a:defRPr sz="1800" kern="1200">
+                <a:solidFill>
+                  <a:schemeClr val="tx1"/>
+                </a:solidFill>
+                <a:latin typeface="+mn-lt"/>
+                <a:ea typeface="+mn-ea"/>
+                <a:cs typeface="+mn-cs"/>
+              </a:defRPr>
+            </a:lvl3pPr>
+            <a:lvl4pPr marL="1371600" algn="l" defTabSz="457200" rtl="0" eaLnBrk="1" latinLnBrk="0" hangingPunct="1">
+              <a:defRPr sz="1800" kern="1200">
+                <a:solidFill>
+                  <a:schemeClr val="tx1"/>
+                </a:solidFill>
+                <a:latin typeface="+mn-lt"/>
+                <a:ea typeface="+mn-ea"/>
+                <a:cs typeface="+mn-cs"/>
+              </a:defRPr>
+            </a:lvl4pPr>
+            <a:lvl5pPr marL="1828800" algn="l" defTabSz="457200" rtl="0" eaLnBrk="1" latinLnBrk="0" hangingPunct="1">
+              <a:defRPr sz="1800" kern="1200">
+                <a:solidFill>
+                  <a:schemeClr val="tx1"/>
+                </a:solidFill>
+                <a:latin typeface="+mn-lt"/>
+                <a:ea typeface="+mn-ea"/>
+                <a:cs typeface="+mn-cs"/>
+              </a:defRPr>
+            </a:lvl5pPr>
+            <a:lvl6pPr marL="2286000" algn="l" defTabSz="457200" rtl="0" eaLnBrk="1" latinLnBrk="0" hangingPunct="1">
+              <a:defRPr sz="1800" kern="1200">
+                <a:solidFill>
+                  <a:schemeClr val="tx1"/>
+                </a:solidFill>
+                <a:latin typeface="+mn-lt"/>
+                <a:ea typeface="+mn-ea"/>
+                <a:cs typeface="+mn-cs"/>
+              </a:defRPr>
+            </a:lvl6pPr>
+            <a:lvl7pPr marL="2743200" algn="l" defTabSz="457200" rtl="0" eaLnBrk="1" latinLnBrk="0" hangingPunct="1">
+              <a:defRPr sz="1800" kern="1200">
+                <a:solidFill>
+                  <a:schemeClr val="tx1"/>
+                </a:solidFill>
+                <a:latin typeface="+mn-lt"/>
+                <a:ea typeface="+mn-ea"/>
+                <a:cs typeface="+mn-cs"/>
+              </a:defRPr>
+            </a:lvl7pPr>
+            <a:lvl8pPr marL="3200400" algn="l" defTabSz="457200" rtl="0" eaLnBrk="1" latinLnBrk="0" hangingPunct="1">
+              <a:defRPr sz="1800" kern="1200">
+                <a:solidFill>
+                  <a:schemeClr val="tx1"/>
+                </a:solidFill>
+                <a:latin typeface="+mn-lt"/>
+                <a:ea typeface="+mn-ea"/>
+                <a:cs typeface="+mn-cs"/>
+              </a:defRPr>
+            </a:lvl8pPr>
+            <a:lvl9pPr marL="3657600" algn="l" defTabSz="457200" rtl="0" eaLnBrk="1" latinLnBrk="0" hangingPunct="1">
+              <a:defRPr sz="1800" kern="1200">
+                <a:solidFill>
+                  <a:schemeClr val="tx1"/>
+                </a:solidFill>
+                <a:latin typeface="+mn-lt"/>
+                <a:ea typeface="+mn-ea"/>
+                <a:cs typeface="+mn-cs"/>
+              </a:defRPr>
+            </a:lvl9pPr>
+          </a:lstStyle>
+          <a:p>
+            <a:pPr algn="just">
+              <a:lnSpc>
+                <a:spcPct val="150000"/>
+              </a:lnSpc>
+            </a:pPr>
+            <a:r>
+              <a:rPr lang="pt-BR" sz="1300">
+                <a:solidFill>
+                  <a:schemeClr val="bg1"/>
+                </a:solidFill>
+                <a:latin typeface="Poppins" pitchFamily="2" charset="77"/>
+                <a:cs typeface="Poppins" pitchFamily="2" charset="77"/>
+              </a:rPr>
+              <a:t>Envio</a:t>
+            </a:r>
+          </a:p>
+          <a:p>
+            <a:pPr algn="just">
+              <a:lnSpc>
+                <a:spcPct val="150000"/>
+              </a:lnSpc>
+            </a:pPr>
+            <a:r>
+              <a:rPr lang="pt-BR" sz="1400" b="1">
+                <a:solidFill>
+                  <a:schemeClr val="bg1"/>
+                </a:solidFill>
+                <a:latin typeface="Poppins"/>
+                <a:cs typeface="Poppins"/>
+              </a:rPr>
+              <a:t>{{de}}</a:t>
+            </a:r>
+            <a:endParaRPr lang="pt-BR" sz="1400" b="1">
+              <a:solidFill>
+                <a:schemeClr val="bg1"/>
+              </a:solidFill>
+              <a:latin typeface="Poppins" pitchFamily="2" charset="77"/>
+              <a:cs typeface="Poppins" pitchFamily="2" charset="77"/>
+            </a:endParaRPr>
+          </a:p>
+        </p:txBody>
+      </p:sp>
+      <p:sp>
+        <p:nvSpPr>
+          <p:cNvPr id="10" name="CaixaDeTexto 10">
+            <a:extLst>
+              <a:ext uri="{FF2B5EF4-FFF2-40B4-BE49-F238E27FC236}">
+                <a16:creationId xmlns:a16="http://schemas.microsoft.com/office/drawing/2014/main" id="{F2C5E29A-D10C-CA36-B091-DE492AE735E2}"/>
+              </a:ext>
+            </a:extLst>
+          </p:cNvPr>
+          <p:cNvSpPr txBox="1"/>
+          <p:nvPr/>
+        </p:nvSpPr>
+        <p:spPr>
+          <a:xfrm>
+            <a:off x="39778" y="1911638"/>
+            <a:ext cx="2065033" cy="307777"/>
+          </a:xfrm>
+          <a:prstGeom prst="rect">
+            <a:avLst/>
+          </a:prstGeom>
+          <a:noFill/>
+        </p:spPr>
+        <p:txBody>
+          <a:bodyPr wrap="square" rtlCol="0">
+            <a:spAutoFit/>
+          </a:bodyPr>
+          <a:lstStyle>
+            <a:defPPr>
+              <a:defRPr lang="en-US"/>
+            </a:defPPr>
+            <a:lvl1pPr marL="0" algn="l" defTabSz="457200" rtl="0" eaLnBrk="1" latinLnBrk="0" hangingPunct="1">
+              <a:defRPr sz="1800" kern="1200">
+                <a:solidFill>
+                  <a:schemeClr val="tx1"/>
+                </a:solidFill>
+                <a:latin typeface="+mn-lt"/>
+                <a:ea typeface="+mn-ea"/>
+                <a:cs typeface="+mn-cs"/>
+              </a:defRPr>
+            </a:lvl1pPr>
+            <a:lvl2pPr marL="457200" algn="l" defTabSz="457200" rtl="0" eaLnBrk="1" latinLnBrk="0" hangingPunct="1">
+              <a:defRPr sz="1800" kern="1200">
+                <a:solidFill>
+                  <a:schemeClr val="tx1"/>
+                </a:solidFill>
+                <a:latin typeface="+mn-lt"/>
+                <a:ea typeface="+mn-ea"/>
+                <a:cs typeface="+mn-cs"/>
+              </a:defRPr>
+            </a:lvl2pPr>
+            <a:lvl3pPr marL="914400" algn="l" defTabSz="457200" rtl="0" eaLnBrk="1" latinLnBrk="0" hangingPunct="1">
+              <a:defRPr sz="1800" kern="1200">
+                <a:solidFill>
+                  <a:schemeClr val="tx1"/>
+                </a:solidFill>
+                <a:latin typeface="+mn-lt"/>
+                <a:ea typeface="+mn-ea"/>
+                <a:cs typeface="+mn-cs"/>
+              </a:defRPr>
+            </a:lvl3pPr>
+            <a:lvl4pPr marL="1371600" algn="l" defTabSz="457200" rtl="0" eaLnBrk="1" latinLnBrk="0" hangingPunct="1">
+              <a:defRPr sz="1800" kern="1200">
+                <a:solidFill>
+                  <a:schemeClr val="tx1"/>
+                </a:solidFill>
+                <a:latin typeface="+mn-lt"/>
+                <a:ea typeface="+mn-ea"/>
+                <a:cs typeface="+mn-cs"/>
+              </a:defRPr>
+            </a:lvl4pPr>
+            <a:lvl5pPr marL="1828800" algn="l" defTabSz="457200" rtl="0" eaLnBrk="1" latinLnBrk="0" hangingPunct="1">
+              <a:defRPr sz="1800" kern="1200">
+                <a:solidFill>
+                  <a:schemeClr val="tx1"/>
+                </a:solidFill>
+                <a:latin typeface="+mn-lt"/>
+                <a:ea typeface="+mn-ea"/>
+                <a:cs typeface="+mn-cs"/>
+              </a:defRPr>
+            </a:lvl5pPr>
+            <a:lvl6pPr marL="2286000" algn="l" defTabSz="457200" rtl="0" eaLnBrk="1" latinLnBrk="0" hangingPunct="1">
+              <a:defRPr sz="1800" kern="1200">
+                <a:solidFill>
+                  <a:schemeClr val="tx1"/>
+                </a:solidFill>
+                <a:latin typeface="+mn-lt"/>
+                <a:ea typeface="+mn-ea"/>
+                <a:cs typeface="+mn-cs"/>
+              </a:defRPr>
+            </a:lvl6pPr>
+            <a:lvl7pPr marL="2743200" algn="l" defTabSz="457200" rtl="0" eaLnBrk="1" latinLnBrk="0" hangingPunct="1">
+              <a:defRPr sz="1800" kern="1200">
+                <a:solidFill>
+                  <a:schemeClr val="tx1"/>
+                </a:solidFill>
+                <a:latin typeface="+mn-lt"/>
+                <a:ea typeface="+mn-ea"/>
+                <a:cs typeface="+mn-cs"/>
+              </a:defRPr>
+            </a:lvl7pPr>
+            <a:lvl8pPr marL="3200400" algn="l" defTabSz="457200" rtl="0" eaLnBrk="1" latinLnBrk="0" hangingPunct="1">
+              <a:defRPr sz="1800" kern="1200">
+                <a:solidFill>
+                  <a:schemeClr val="tx1"/>
+                </a:solidFill>
+                <a:latin typeface="+mn-lt"/>
+                <a:ea typeface="+mn-ea"/>
+                <a:cs typeface="+mn-cs"/>
+              </a:defRPr>
+            </a:lvl8pPr>
+            <a:lvl9pPr marL="3657600" algn="l" defTabSz="457200" rtl="0" eaLnBrk="1" latinLnBrk="0" hangingPunct="1">
+              <a:defRPr sz="1800" kern="1200">
+                <a:solidFill>
+                  <a:schemeClr val="tx1"/>
+                </a:solidFill>
+                <a:latin typeface="+mn-lt"/>
+                <a:ea typeface="+mn-ea"/>
+                <a:cs typeface="+mn-cs"/>
+              </a:defRPr>
+            </a:lvl9pPr>
+          </a:lstStyle>
+          <a:p>
+            <a:r>
+              <a:rPr lang="pt-PT" sz="1400">
+                <a:solidFill>
+                  <a:schemeClr val="bg1"/>
+                </a:solidFill>
+                <a:effectLst/>
+                <a:latin typeface="Poppins" pitchFamily="2" charset="77"/>
+                <a:cs typeface="Poppins" pitchFamily="2" charset="77"/>
+              </a:rPr>
+              <a:t>Projeto</a:t>
+            </a:r>
+          </a:p>
+        </p:txBody>
+      </p:sp>
+      <p:sp>
+        <p:nvSpPr>
+          <p:cNvPr id="11" name="CaixaDeTexto 10">
+            <a:extLst>
+              <a:ext uri="{FF2B5EF4-FFF2-40B4-BE49-F238E27FC236}">
+                <a16:creationId xmlns:a16="http://schemas.microsoft.com/office/drawing/2014/main" id="{4819A0C1-836E-23D3-ED0D-F7EA7716142B}"/>
+              </a:ext>
+            </a:extLst>
+          </p:cNvPr>
+          <p:cNvSpPr txBox="1"/>
+          <p:nvPr/>
+        </p:nvSpPr>
+        <p:spPr>
+          <a:xfrm>
+            <a:off x="39778" y="2660340"/>
+            <a:ext cx="2065033" cy="307777"/>
+          </a:xfrm>
+          <a:prstGeom prst="rect">
+            <a:avLst/>
+          </a:prstGeom>
+          <a:noFill/>
+        </p:spPr>
+        <p:txBody>
+          <a:bodyPr wrap="square" rtlCol="0">
+            <a:spAutoFit/>
+          </a:bodyPr>
+          <a:lstStyle>
+            <a:defPPr>
+              <a:defRPr lang="en-US"/>
+            </a:defPPr>
+            <a:lvl1pPr marL="0" algn="l" defTabSz="457200" rtl="0" eaLnBrk="1" latinLnBrk="0" hangingPunct="1">
+              <a:defRPr sz="1800" kern="1200">
+                <a:solidFill>
+                  <a:schemeClr val="tx1"/>
+                </a:solidFill>
+                <a:latin typeface="+mn-lt"/>
+                <a:ea typeface="+mn-ea"/>
+                <a:cs typeface="+mn-cs"/>
+              </a:defRPr>
+            </a:lvl1pPr>
+            <a:lvl2pPr marL="457200" algn="l" defTabSz="457200" rtl="0" eaLnBrk="1" latinLnBrk="0" hangingPunct="1">
+              <a:defRPr sz="1800" kern="1200">
+                <a:solidFill>
+                  <a:schemeClr val="tx1"/>
+                </a:solidFill>
+                <a:latin typeface="+mn-lt"/>
+                <a:ea typeface="+mn-ea"/>
+                <a:cs typeface="+mn-cs"/>
+              </a:defRPr>
+            </a:lvl2pPr>
+            <a:lvl3pPr marL="914400" algn="l" defTabSz="457200" rtl="0" eaLnBrk="1" latinLnBrk="0" hangingPunct="1">
+              <a:defRPr sz="1800" kern="1200">
+                <a:solidFill>
+                  <a:schemeClr val="tx1"/>
+                </a:solidFill>
+                <a:latin typeface="+mn-lt"/>
+                <a:ea typeface="+mn-ea"/>
+                <a:cs typeface="+mn-cs"/>
+              </a:defRPr>
+            </a:lvl3pPr>
+            <a:lvl4pPr marL="1371600" algn="l" defTabSz="457200" rtl="0" eaLnBrk="1" latinLnBrk="0" hangingPunct="1">
+              <a:defRPr sz="1800" kern="1200">
+                <a:solidFill>
+                  <a:schemeClr val="tx1"/>
+                </a:solidFill>
+                <a:latin typeface="+mn-lt"/>
+                <a:ea typeface="+mn-ea"/>
+                <a:cs typeface="+mn-cs"/>
+              </a:defRPr>
+            </a:lvl4pPr>
+            <a:lvl5pPr marL="1828800" algn="l" defTabSz="457200" rtl="0" eaLnBrk="1" latinLnBrk="0" hangingPunct="1">
+              <a:defRPr sz="1800" kern="1200">
+                <a:solidFill>
+                  <a:schemeClr val="tx1"/>
+                </a:solidFill>
+                <a:latin typeface="+mn-lt"/>
+                <a:ea typeface="+mn-ea"/>
+                <a:cs typeface="+mn-cs"/>
+              </a:defRPr>
+            </a:lvl5pPr>
+            <a:lvl6pPr marL="2286000" algn="l" defTabSz="457200" rtl="0" eaLnBrk="1" latinLnBrk="0" hangingPunct="1">
+              <a:defRPr sz="1800" kern="1200">
+                <a:solidFill>
+                  <a:schemeClr val="tx1"/>
+                </a:solidFill>
+                <a:latin typeface="+mn-lt"/>
+                <a:ea typeface="+mn-ea"/>
+                <a:cs typeface="+mn-cs"/>
+              </a:defRPr>
+            </a:lvl6pPr>
+            <a:lvl7pPr marL="2743200" algn="l" defTabSz="457200" rtl="0" eaLnBrk="1" latinLnBrk="0" hangingPunct="1">
+              <a:defRPr sz="1800" kern="1200">
+                <a:solidFill>
+                  <a:schemeClr val="tx1"/>
+                </a:solidFill>
+                <a:latin typeface="+mn-lt"/>
+                <a:ea typeface="+mn-ea"/>
+                <a:cs typeface="+mn-cs"/>
+              </a:defRPr>
+            </a:lvl7pPr>
+            <a:lvl8pPr marL="3200400" algn="l" defTabSz="457200" rtl="0" eaLnBrk="1" latinLnBrk="0" hangingPunct="1">
+              <a:defRPr sz="1800" kern="1200">
+                <a:solidFill>
+                  <a:schemeClr val="tx1"/>
+                </a:solidFill>
+                <a:latin typeface="+mn-lt"/>
+                <a:ea typeface="+mn-ea"/>
+                <a:cs typeface="+mn-cs"/>
+              </a:defRPr>
+            </a:lvl8pPr>
+            <a:lvl9pPr marL="3657600" algn="l" defTabSz="457200" rtl="0" eaLnBrk="1" latinLnBrk="0" hangingPunct="1">
+              <a:defRPr sz="1800" kern="1200">
+                <a:solidFill>
+                  <a:schemeClr val="tx1"/>
+                </a:solidFill>
+                <a:latin typeface="+mn-lt"/>
+                <a:ea typeface="+mn-ea"/>
+                <a:cs typeface="+mn-cs"/>
+              </a:defRPr>
+            </a:lvl9pPr>
+          </a:lstStyle>
+          <a:p>
+            <a:r>
+              <a:rPr lang="pt-PT" sz="1400">
+                <a:solidFill>
+                  <a:schemeClr val="bg1"/>
+                </a:solidFill>
+                <a:effectLst/>
+                <a:latin typeface="Poppins" pitchFamily="2" charset="77"/>
+                <a:cs typeface="Poppins" pitchFamily="2" charset="77"/>
+              </a:rPr>
+              <a:t>Pagamento</a:t>
+            </a:r>
+          </a:p>
+        </p:txBody>
+      </p:sp>
+      <p:sp>
+        <p:nvSpPr>
+          <p:cNvPr id="12" name="CaixaDeTexto 10">
+            <a:extLst>
+              <a:ext uri="{FF2B5EF4-FFF2-40B4-BE49-F238E27FC236}">
+                <a16:creationId xmlns:a16="http://schemas.microsoft.com/office/drawing/2014/main" id="{40318AF3-2BC7-A1F7-3085-F5560888ECEF}"/>
+              </a:ext>
+            </a:extLst>
+          </p:cNvPr>
+          <p:cNvSpPr txBox="1"/>
+          <p:nvPr/>
+        </p:nvSpPr>
+        <p:spPr>
+          <a:xfrm>
+            <a:off x="39778" y="2285989"/>
+            <a:ext cx="2065033" cy="307777"/>
+          </a:xfrm>
+          <a:prstGeom prst="rect">
+            <a:avLst/>
+          </a:prstGeom>
+          <a:noFill/>
+        </p:spPr>
+        <p:txBody>
+          <a:bodyPr wrap="square" rtlCol="0">
+            <a:spAutoFit/>
+          </a:bodyPr>
+          <a:lstStyle>
+            <a:defPPr>
+              <a:defRPr lang="en-US"/>
+            </a:defPPr>
+            <a:lvl1pPr marL="0" algn="l" defTabSz="457200" rtl="0" eaLnBrk="1" latinLnBrk="0" hangingPunct="1">
+              <a:defRPr sz="1800" kern="1200">
+                <a:solidFill>
+                  <a:schemeClr val="tx1"/>
+                </a:solidFill>
+                <a:latin typeface="+mn-lt"/>
+                <a:ea typeface="+mn-ea"/>
+                <a:cs typeface="+mn-cs"/>
+              </a:defRPr>
+            </a:lvl1pPr>
+            <a:lvl2pPr marL="457200" algn="l" defTabSz="457200" rtl="0" eaLnBrk="1" latinLnBrk="0" hangingPunct="1">
+              <a:defRPr sz="1800" kern="1200">
+                <a:solidFill>
+                  <a:schemeClr val="tx1"/>
+                </a:solidFill>
+                <a:latin typeface="+mn-lt"/>
+                <a:ea typeface="+mn-ea"/>
+                <a:cs typeface="+mn-cs"/>
+              </a:defRPr>
+            </a:lvl2pPr>
+            <a:lvl3pPr marL="914400" algn="l" defTabSz="457200" rtl="0" eaLnBrk="1" latinLnBrk="0" hangingPunct="1">
+              <a:defRPr sz="1800" kern="1200">
+                <a:solidFill>
+                  <a:schemeClr val="tx1"/>
+                </a:solidFill>
+                <a:latin typeface="+mn-lt"/>
+                <a:ea typeface="+mn-ea"/>
+                <a:cs typeface="+mn-cs"/>
+              </a:defRPr>
+            </a:lvl3pPr>
+            <a:lvl4pPr marL="1371600" algn="l" defTabSz="457200" rtl="0" eaLnBrk="1" latinLnBrk="0" hangingPunct="1">
+              <a:defRPr sz="1800" kern="1200">
+                <a:solidFill>
+                  <a:schemeClr val="tx1"/>
+                </a:solidFill>
+                <a:latin typeface="+mn-lt"/>
+                <a:ea typeface="+mn-ea"/>
+                <a:cs typeface="+mn-cs"/>
+              </a:defRPr>
+            </a:lvl4pPr>
+            <a:lvl5pPr marL="1828800" algn="l" defTabSz="457200" rtl="0" eaLnBrk="1" latinLnBrk="0" hangingPunct="1">
+              <a:defRPr sz="1800" kern="1200">
+                <a:solidFill>
+                  <a:schemeClr val="tx1"/>
+                </a:solidFill>
+                <a:latin typeface="+mn-lt"/>
+                <a:ea typeface="+mn-ea"/>
+                <a:cs typeface="+mn-cs"/>
+              </a:defRPr>
+            </a:lvl5pPr>
+            <a:lvl6pPr marL="2286000" algn="l" defTabSz="457200" rtl="0" eaLnBrk="1" latinLnBrk="0" hangingPunct="1">
+              <a:defRPr sz="1800" kern="1200">
+                <a:solidFill>
+                  <a:schemeClr val="tx1"/>
+                </a:solidFill>
+                <a:latin typeface="+mn-lt"/>
+                <a:ea typeface="+mn-ea"/>
+                <a:cs typeface="+mn-cs"/>
+              </a:defRPr>
+            </a:lvl6pPr>
+            <a:lvl7pPr marL="2743200" algn="l" defTabSz="457200" rtl="0" eaLnBrk="1" latinLnBrk="0" hangingPunct="1">
+              <a:defRPr sz="1800" kern="1200">
+                <a:solidFill>
+                  <a:schemeClr val="tx1"/>
+                </a:solidFill>
+                <a:latin typeface="+mn-lt"/>
+                <a:ea typeface="+mn-ea"/>
+                <a:cs typeface="+mn-cs"/>
+              </a:defRPr>
+            </a:lvl7pPr>
+            <a:lvl8pPr marL="3200400" algn="l" defTabSz="457200" rtl="0" eaLnBrk="1" latinLnBrk="0" hangingPunct="1">
+              <a:defRPr sz="1800" kern="1200">
+                <a:solidFill>
+                  <a:schemeClr val="tx1"/>
+                </a:solidFill>
+                <a:latin typeface="+mn-lt"/>
+                <a:ea typeface="+mn-ea"/>
+                <a:cs typeface="+mn-cs"/>
+              </a:defRPr>
+            </a:lvl8pPr>
+            <a:lvl9pPr marL="3657600" algn="l" defTabSz="457200" rtl="0" eaLnBrk="1" latinLnBrk="0" hangingPunct="1">
+              <a:defRPr sz="1800" kern="1200">
+                <a:solidFill>
+                  <a:schemeClr val="tx1"/>
+                </a:solidFill>
+                <a:latin typeface="+mn-lt"/>
+                <a:ea typeface="+mn-ea"/>
+                <a:cs typeface="+mn-cs"/>
+              </a:defRPr>
+            </a:lvl9pPr>
+          </a:lstStyle>
+          <a:p>
+            <a:r>
+              <a:rPr lang="pt-PT" sz="1400">
+                <a:solidFill>
+                  <a:schemeClr val="bg1"/>
+                </a:solidFill>
+                <a:effectLst/>
+                <a:latin typeface="Poppins" pitchFamily="2" charset="77"/>
+                <a:cs typeface="Poppins" pitchFamily="2" charset="77"/>
+              </a:rPr>
+              <a:t>Investimento</a:t>
+            </a:r>
+          </a:p>
+        </p:txBody>
+      </p:sp>
+      <p:sp>
+        <p:nvSpPr>
+          <p:cNvPr id="13" name="CaixaDeTexto 10">
+            <a:extLst>
+              <a:ext uri="{FF2B5EF4-FFF2-40B4-BE49-F238E27FC236}">
+                <a16:creationId xmlns:a16="http://schemas.microsoft.com/office/drawing/2014/main" id="{9C363811-49CA-5743-DA48-87998438BA15}"/>
+              </a:ext>
+            </a:extLst>
+          </p:cNvPr>
+          <p:cNvSpPr txBox="1"/>
+          <p:nvPr/>
+        </p:nvSpPr>
+        <p:spPr>
+          <a:xfrm>
+            <a:off x="39778" y="3034691"/>
+            <a:ext cx="2065033" cy="307777"/>
+          </a:xfrm>
+          <a:prstGeom prst="rect">
+            <a:avLst/>
+          </a:prstGeom>
+          <a:noFill/>
+        </p:spPr>
+        <p:txBody>
+          <a:bodyPr wrap="square" rtlCol="0">
+            <a:spAutoFit/>
+          </a:bodyPr>
+          <a:lstStyle>
+            <a:defPPr>
+              <a:defRPr lang="en-US"/>
+            </a:defPPr>
+            <a:lvl1pPr marL="0" algn="l" defTabSz="457200" rtl="0" eaLnBrk="1" latinLnBrk="0" hangingPunct="1">
+              <a:defRPr sz="1800" kern="1200">
+                <a:solidFill>
+                  <a:schemeClr val="tx1"/>
+                </a:solidFill>
+                <a:latin typeface="+mn-lt"/>
+                <a:ea typeface="+mn-ea"/>
+                <a:cs typeface="+mn-cs"/>
+              </a:defRPr>
+            </a:lvl1pPr>
+            <a:lvl2pPr marL="457200" algn="l" defTabSz="457200" rtl="0" eaLnBrk="1" latinLnBrk="0" hangingPunct="1">
+              <a:defRPr sz="1800" kern="1200">
+                <a:solidFill>
+                  <a:schemeClr val="tx1"/>
+                </a:solidFill>
+                <a:latin typeface="+mn-lt"/>
+                <a:ea typeface="+mn-ea"/>
+                <a:cs typeface="+mn-cs"/>
+              </a:defRPr>
+            </a:lvl2pPr>
+            <a:lvl3pPr marL="914400" algn="l" defTabSz="457200" rtl="0" eaLnBrk="1" latinLnBrk="0" hangingPunct="1">
+              <a:defRPr sz="1800" kern="1200">
+                <a:solidFill>
+                  <a:schemeClr val="tx1"/>
+                </a:solidFill>
+                <a:latin typeface="+mn-lt"/>
+                <a:ea typeface="+mn-ea"/>
+                <a:cs typeface="+mn-cs"/>
+              </a:defRPr>
+            </a:lvl3pPr>
+            <a:lvl4pPr marL="1371600" algn="l" defTabSz="457200" rtl="0" eaLnBrk="1" latinLnBrk="0" hangingPunct="1">
+              <a:defRPr sz="1800" kern="1200">
+                <a:solidFill>
+                  <a:schemeClr val="tx1"/>
+                </a:solidFill>
+                <a:latin typeface="+mn-lt"/>
+                <a:ea typeface="+mn-ea"/>
+                <a:cs typeface="+mn-cs"/>
+              </a:defRPr>
+            </a:lvl4pPr>
+            <a:lvl5pPr marL="1828800" algn="l" defTabSz="457200" rtl="0" eaLnBrk="1" latinLnBrk="0" hangingPunct="1">
+              <a:defRPr sz="1800" kern="1200">
+                <a:solidFill>
+                  <a:schemeClr val="tx1"/>
+                </a:solidFill>
+                <a:latin typeface="+mn-lt"/>
+                <a:ea typeface="+mn-ea"/>
+                <a:cs typeface="+mn-cs"/>
+              </a:defRPr>
+            </a:lvl5pPr>
+            <a:lvl6pPr marL="2286000" algn="l" defTabSz="457200" rtl="0" eaLnBrk="1" latinLnBrk="0" hangingPunct="1">
+              <a:defRPr sz="1800" kern="1200">
+                <a:solidFill>
+                  <a:schemeClr val="tx1"/>
+                </a:solidFill>
+                <a:latin typeface="+mn-lt"/>
+                <a:ea typeface="+mn-ea"/>
+                <a:cs typeface="+mn-cs"/>
+              </a:defRPr>
+            </a:lvl6pPr>
+            <a:lvl7pPr marL="2743200" algn="l" defTabSz="457200" rtl="0" eaLnBrk="1" latinLnBrk="0" hangingPunct="1">
+              <a:defRPr sz="1800" kern="1200">
+                <a:solidFill>
+                  <a:schemeClr val="tx1"/>
+                </a:solidFill>
+                <a:latin typeface="+mn-lt"/>
+                <a:ea typeface="+mn-ea"/>
+                <a:cs typeface="+mn-cs"/>
+              </a:defRPr>
+            </a:lvl7pPr>
+            <a:lvl8pPr marL="3200400" algn="l" defTabSz="457200" rtl="0" eaLnBrk="1" latinLnBrk="0" hangingPunct="1">
+              <a:defRPr sz="1800" kern="1200">
+                <a:solidFill>
+                  <a:schemeClr val="tx1"/>
+                </a:solidFill>
+                <a:latin typeface="+mn-lt"/>
+                <a:ea typeface="+mn-ea"/>
+                <a:cs typeface="+mn-cs"/>
+              </a:defRPr>
+            </a:lvl8pPr>
+            <a:lvl9pPr marL="3657600" algn="l" defTabSz="457200" rtl="0" eaLnBrk="1" latinLnBrk="0" hangingPunct="1">
+              <a:defRPr sz="1800" kern="1200">
+                <a:solidFill>
+                  <a:schemeClr val="tx1"/>
+                </a:solidFill>
+                <a:latin typeface="+mn-lt"/>
+                <a:ea typeface="+mn-ea"/>
+                <a:cs typeface="+mn-cs"/>
+              </a:defRPr>
+            </a:lvl9pPr>
+          </a:lstStyle>
+          <a:p>
+            <a:r>
+              <a:rPr lang="pt-PT" sz="1400">
+                <a:solidFill>
+                  <a:schemeClr val="bg1"/>
+                </a:solidFill>
+                <a:effectLst/>
+                <a:latin typeface="Poppins" pitchFamily="2" charset="77"/>
+                <a:cs typeface="Poppins" pitchFamily="2" charset="77"/>
+              </a:rPr>
+              <a:t>Prazos</a:t>
+            </a:r>
+          </a:p>
+        </p:txBody>
+      </p:sp>
+      <p:sp>
+        <p:nvSpPr>
+          <p:cNvPr id="14" name="CaixaDeTexto 10">
+            <a:extLst>
+              <a:ext uri="{FF2B5EF4-FFF2-40B4-BE49-F238E27FC236}">
+                <a16:creationId xmlns:a16="http://schemas.microsoft.com/office/drawing/2014/main" id="{FAFE0301-D765-A669-69FC-05454F548692}"/>
+              </a:ext>
+            </a:extLst>
+          </p:cNvPr>
+          <p:cNvSpPr txBox="1"/>
+          <p:nvPr/>
+        </p:nvSpPr>
+        <p:spPr>
+          <a:xfrm>
+            <a:off x="39778" y="3409042"/>
+            <a:ext cx="2065033" cy="307777"/>
+          </a:xfrm>
+          <a:prstGeom prst="rect">
+            <a:avLst/>
+          </a:prstGeom>
+          <a:noFill/>
+        </p:spPr>
+        <p:txBody>
+          <a:bodyPr wrap="square" rtlCol="0">
+            <a:spAutoFit/>
+          </a:bodyPr>
+          <a:lstStyle>
+            <a:defPPr>
+              <a:defRPr lang="en-US"/>
+            </a:defPPr>
+            <a:lvl1pPr marL="0" algn="l" defTabSz="457200" rtl="0" eaLnBrk="1" latinLnBrk="0" hangingPunct="1">
+              <a:defRPr sz="1800" kern="1200">
+                <a:solidFill>
+                  <a:schemeClr val="tx1"/>
+                </a:solidFill>
+                <a:latin typeface="+mn-lt"/>
+                <a:ea typeface="+mn-ea"/>
+                <a:cs typeface="+mn-cs"/>
+              </a:defRPr>
+            </a:lvl1pPr>
+            <a:lvl2pPr marL="457200" algn="l" defTabSz="457200" rtl="0" eaLnBrk="1" latinLnBrk="0" hangingPunct="1">
+              <a:defRPr sz="1800" kern="1200">
+                <a:solidFill>
+                  <a:schemeClr val="tx1"/>
+                </a:solidFill>
+                <a:latin typeface="+mn-lt"/>
+                <a:ea typeface="+mn-ea"/>
+                <a:cs typeface="+mn-cs"/>
+              </a:defRPr>
+            </a:lvl2pPr>
+            <a:lvl3pPr marL="914400" algn="l" defTabSz="457200" rtl="0" eaLnBrk="1" latinLnBrk="0" hangingPunct="1">
+              <a:defRPr sz="1800" kern="1200">
+                <a:solidFill>
+                  <a:schemeClr val="tx1"/>
+                </a:solidFill>
+                <a:latin typeface="+mn-lt"/>
+                <a:ea typeface="+mn-ea"/>
+                <a:cs typeface="+mn-cs"/>
+              </a:defRPr>
+            </a:lvl3pPr>
+            <a:lvl4pPr marL="1371600" algn="l" defTabSz="457200" rtl="0" eaLnBrk="1" latinLnBrk="0" hangingPunct="1">
+              <a:defRPr sz="1800" kern="1200">
+                <a:solidFill>
+                  <a:schemeClr val="tx1"/>
+                </a:solidFill>
+                <a:latin typeface="+mn-lt"/>
+                <a:ea typeface="+mn-ea"/>
+                <a:cs typeface="+mn-cs"/>
+              </a:defRPr>
+            </a:lvl4pPr>
+            <a:lvl5pPr marL="1828800" algn="l" defTabSz="457200" rtl="0" eaLnBrk="1" latinLnBrk="0" hangingPunct="1">
+              <a:defRPr sz="1800" kern="1200">
+                <a:solidFill>
+                  <a:schemeClr val="tx1"/>
+                </a:solidFill>
+                <a:latin typeface="+mn-lt"/>
+                <a:ea typeface="+mn-ea"/>
+                <a:cs typeface="+mn-cs"/>
+              </a:defRPr>
+            </a:lvl5pPr>
+            <a:lvl6pPr marL="2286000" algn="l" defTabSz="457200" rtl="0" eaLnBrk="1" latinLnBrk="0" hangingPunct="1">
+              <a:defRPr sz="1800" kern="1200">
+                <a:solidFill>
+                  <a:schemeClr val="tx1"/>
+                </a:solidFill>
+                <a:latin typeface="+mn-lt"/>
+                <a:ea typeface="+mn-ea"/>
+                <a:cs typeface="+mn-cs"/>
+              </a:defRPr>
+            </a:lvl6pPr>
+            <a:lvl7pPr marL="2743200" algn="l" defTabSz="457200" rtl="0" eaLnBrk="1" latinLnBrk="0" hangingPunct="1">
+              <a:defRPr sz="1800" kern="1200">
+                <a:solidFill>
+                  <a:schemeClr val="tx1"/>
+                </a:solidFill>
+                <a:latin typeface="+mn-lt"/>
+                <a:ea typeface="+mn-ea"/>
+                <a:cs typeface="+mn-cs"/>
+              </a:defRPr>
+            </a:lvl7pPr>
+            <a:lvl8pPr marL="3200400" algn="l" defTabSz="457200" rtl="0" eaLnBrk="1" latinLnBrk="0" hangingPunct="1">
+              <a:defRPr sz="1800" kern="1200">
+                <a:solidFill>
+                  <a:schemeClr val="tx1"/>
+                </a:solidFill>
+                <a:latin typeface="+mn-lt"/>
+                <a:ea typeface="+mn-ea"/>
+                <a:cs typeface="+mn-cs"/>
+              </a:defRPr>
+            </a:lvl8pPr>
+            <a:lvl9pPr marL="3657600" algn="l" defTabSz="457200" rtl="0" eaLnBrk="1" latinLnBrk="0" hangingPunct="1">
+              <a:defRPr sz="1800" kern="1200">
+                <a:solidFill>
+                  <a:schemeClr val="tx1"/>
+                </a:solidFill>
+                <a:latin typeface="+mn-lt"/>
+                <a:ea typeface="+mn-ea"/>
+                <a:cs typeface="+mn-cs"/>
+              </a:defRPr>
+            </a:lvl9pPr>
+          </a:lstStyle>
+          <a:p>
+            <a:r>
+              <a:rPr lang="pt-PT" sz="1400">
+                <a:solidFill>
+                  <a:schemeClr val="bg1"/>
+                </a:solidFill>
+                <a:effectLst/>
+                <a:latin typeface="Poppins" pitchFamily="2" charset="77"/>
+                <a:cs typeface="Poppins" pitchFamily="2" charset="77"/>
+              </a:rPr>
+              <a:t>Garantia</a:t>
+            </a:r>
+          </a:p>
+        </p:txBody>
+      </p:sp>
+      <p:sp>
+        <p:nvSpPr>
+          <p:cNvPr id="18" name="CaixaDeTexto 10">
+            <a:extLst>
+              <a:ext uri="{FF2B5EF4-FFF2-40B4-BE49-F238E27FC236}">
+                <a16:creationId xmlns:a16="http://schemas.microsoft.com/office/drawing/2014/main" id="{2EAF200E-5E09-8C4C-BA5F-5FAB0D8CBFF3}"/>
+              </a:ext>
+            </a:extLst>
+          </p:cNvPr>
+          <p:cNvSpPr txBox="1"/>
+          <p:nvPr/>
+        </p:nvSpPr>
+        <p:spPr>
+          <a:xfrm>
+            <a:off x="39778" y="3783395"/>
+            <a:ext cx="2065033" cy="307777"/>
+          </a:xfrm>
+          <a:prstGeom prst="rect">
+            <a:avLst/>
+          </a:prstGeom>
+          <a:noFill/>
+        </p:spPr>
+        <p:txBody>
+          <a:bodyPr wrap="square" rtlCol="0">
+            <a:spAutoFit/>
+          </a:bodyPr>
+          <a:lstStyle>
+            <a:defPPr>
+              <a:defRPr lang="en-US"/>
+            </a:defPPr>
+            <a:lvl1pPr marL="0" algn="l" defTabSz="457200" rtl="0" eaLnBrk="1" latinLnBrk="0" hangingPunct="1">
+              <a:defRPr sz="1800" kern="1200">
+                <a:solidFill>
+                  <a:schemeClr val="tx1"/>
+                </a:solidFill>
+                <a:latin typeface="+mn-lt"/>
+                <a:ea typeface="+mn-ea"/>
+                <a:cs typeface="+mn-cs"/>
+              </a:defRPr>
+            </a:lvl1pPr>
+            <a:lvl2pPr marL="457200" algn="l" defTabSz="457200" rtl="0" eaLnBrk="1" latinLnBrk="0" hangingPunct="1">
+              <a:defRPr sz="1800" kern="1200">
+                <a:solidFill>
+                  <a:schemeClr val="tx1"/>
+                </a:solidFill>
+                <a:latin typeface="+mn-lt"/>
+                <a:ea typeface="+mn-ea"/>
+                <a:cs typeface="+mn-cs"/>
+              </a:defRPr>
+            </a:lvl2pPr>
+            <a:lvl3pPr marL="914400" algn="l" defTabSz="457200" rtl="0" eaLnBrk="1" latinLnBrk="0" hangingPunct="1">
+              <a:defRPr sz="1800" kern="1200">
+                <a:solidFill>
+                  <a:schemeClr val="tx1"/>
+                </a:solidFill>
+                <a:latin typeface="+mn-lt"/>
+                <a:ea typeface="+mn-ea"/>
+                <a:cs typeface="+mn-cs"/>
+              </a:defRPr>
+            </a:lvl3pPr>
+            <a:lvl4pPr marL="1371600" algn="l" defTabSz="457200" rtl="0" eaLnBrk="1" latinLnBrk="0" hangingPunct="1">
+              <a:defRPr sz="1800" kern="1200">
+                <a:solidFill>
+                  <a:schemeClr val="tx1"/>
+                </a:solidFill>
+                <a:latin typeface="+mn-lt"/>
+                <a:ea typeface="+mn-ea"/>
+                <a:cs typeface="+mn-cs"/>
+              </a:defRPr>
+            </a:lvl4pPr>
+            <a:lvl5pPr marL="1828800" algn="l" defTabSz="457200" rtl="0" eaLnBrk="1" latinLnBrk="0" hangingPunct="1">
+              <a:defRPr sz="1800" kern="1200">
+                <a:solidFill>
+                  <a:schemeClr val="tx1"/>
+                </a:solidFill>
+                <a:latin typeface="+mn-lt"/>
+                <a:ea typeface="+mn-ea"/>
+                <a:cs typeface="+mn-cs"/>
+              </a:defRPr>
+            </a:lvl5pPr>
+            <a:lvl6pPr marL="2286000" algn="l" defTabSz="457200" rtl="0" eaLnBrk="1" latinLnBrk="0" hangingPunct="1">
+              <a:defRPr sz="1800" kern="1200">
+                <a:solidFill>
+                  <a:schemeClr val="tx1"/>
+                </a:solidFill>
+                <a:latin typeface="+mn-lt"/>
+                <a:ea typeface="+mn-ea"/>
+                <a:cs typeface="+mn-cs"/>
+              </a:defRPr>
+            </a:lvl6pPr>
+            <a:lvl7pPr marL="2743200" algn="l" defTabSz="457200" rtl="0" eaLnBrk="1" latinLnBrk="0" hangingPunct="1">
+              <a:defRPr sz="1800" kern="1200">
+                <a:solidFill>
+                  <a:schemeClr val="tx1"/>
+                </a:solidFill>
+                <a:latin typeface="+mn-lt"/>
+                <a:ea typeface="+mn-ea"/>
+                <a:cs typeface="+mn-cs"/>
+              </a:defRPr>
+            </a:lvl7pPr>
+            <a:lvl8pPr marL="3200400" algn="l" defTabSz="457200" rtl="0" eaLnBrk="1" latinLnBrk="0" hangingPunct="1">
+              <a:defRPr sz="1800" kern="1200">
+                <a:solidFill>
+                  <a:schemeClr val="tx1"/>
+                </a:solidFill>
+                <a:latin typeface="+mn-lt"/>
+                <a:ea typeface="+mn-ea"/>
+                <a:cs typeface="+mn-cs"/>
+              </a:defRPr>
+            </a:lvl8pPr>
+            <a:lvl9pPr marL="3657600" algn="l" defTabSz="457200" rtl="0" eaLnBrk="1" latinLnBrk="0" hangingPunct="1">
+              <a:defRPr sz="1800" kern="1200">
+                <a:solidFill>
+                  <a:schemeClr val="tx1"/>
+                </a:solidFill>
+                <a:latin typeface="+mn-lt"/>
+                <a:ea typeface="+mn-ea"/>
+                <a:cs typeface="+mn-cs"/>
+              </a:defRPr>
+            </a:lvl9pPr>
+          </a:lstStyle>
+          <a:p>
+            <a:r>
+              <a:rPr lang="pt-PT" sz="1400">
+                <a:solidFill>
+                  <a:schemeClr val="bg1"/>
+                </a:solidFill>
+                <a:effectLst/>
+                <a:latin typeface="Poppins" pitchFamily="2" charset="77"/>
+                <a:cs typeface="Poppins" pitchFamily="2" charset="77"/>
+              </a:rPr>
+              <a:t>Regras </a:t>
+            </a:r>
+          </a:p>
+        </p:txBody>
+      </p:sp>
       <p:pic>
         <p:nvPicPr>
-          <p:cNvPr id="7" name="Imagem 5" descr="Desenho de um círculo&#10;&#10;Descrição gerada automaticamente com confiança baixa">
+          <p:cNvPr id="28" name="Imagem 27" descr="Desenho de um círculo&#10;&#10;Descrição gerada automaticamente com confiança baixa">
             <a:extLst>
               <a:ext uri="{FF2B5EF4-FFF2-40B4-BE49-F238E27FC236}">
-                <a16:creationId xmlns:a16="http://schemas.microsoft.com/office/drawing/2014/main" id="{A79A1F1D-F3BF-1BF8-92F0-799FCE395F10}"/>
+                <a16:creationId xmlns:a16="http://schemas.microsoft.com/office/drawing/2014/main" id="{42EBCB69-E06C-6F05-0E40-203F61E50BC9}"/>
               </a:ext>
             </a:extLst>
           </p:cNvPr>
@@ -3637,658 +5401,21 @@
         </p:nvPicPr>
         <p:blipFill>
           <a:blip r:embed="rId3"/>
+          <a:srcRect/>
           <a:stretch>
             <a:fillRect/>
           </a:stretch>
         </p:blipFill>
         <p:spPr>
           <a:xfrm>
-            <a:off x="277394" y="322704"/>
-            <a:ext cx="622719" cy="600016"/>
+            <a:off x="257175" y="309563"/>
+            <a:ext cx="628650" cy="600075"/>
           </a:xfrm>
           <a:prstGeom prst="rect">
             <a:avLst/>
           </a:prstGeom>
         </p:spPr>
       </p:pic>
-      <p:sp>
-        <p:nvSpPr>
-          <p:cNvPr id="15" name="CaixaDeTexto 10">
-            <a:extLst>
-              <a:ext uri="{FF2B5EF4-FFF2-40B4-BE49-F238E27FC236}">
-                <a16:creationId xmlns:a16="http://schemas.microsoft.com/office/drawing/2014/main" id="{A25FDD9F-37AC-20FF-4419-477CFA78378B}"/>
-              </a:ext>
-            </a:extLst>
-          </p:cNvPr>
-          <p:cNvSpPr txBox="1"/>
-          <p:nvPr/>
-        </p:nvSpPr>
-        <p:spPr>
-          <a:xfrm>
-            <a:off x="39778" y="1911638"/>
-            <a:ext cx="2065033" cy="307777"/>
-          </a:xfrm>
-          <a:prstGeom prst="rect">
-            <a:avLst/>
-          </a:prstGeom>
-          <a:noFill/>
-        </p:spPr>
-        <p:txBody>
-          <a:bodyPr wrap="square" rtlCol="0">
-            <a:spAutoFit/>
-          </a:bodyPr>
-          <a:lstStyle/>
-          <a:p>
-            <a:r>
-              <a:rPr lang="pt-PT" sz="1400">
-                <a:solidFill>
-                  <a:schemeClr val="bg1"/>
-                </a:solidFill>
-                <a:effectLst/>
-                <a:latin typeface="Poppins" pitchFamily="2" charset="77"/>
-                <a:cs typeface="Poppins" pitchFamily="2" charset="77"/>
-              </a:rPr>
-              <a:t>Projeto</a:t>
-            </a:r>
-          </a:p>
-        </p:txBody>
-      </p:sp>
-      <p:sp>
-        <p:nvSpPr>
-          <p:cNvPr id="16" name="CaixaDeTexto 10">
-            <a:extLst>
-              <a:ext uri="{FF2B5EF4-FFF2-40B4-BE49-F238E27FC236}">
-                <a16:creationId xmlns:a16="http://schemas.microsoft.com/office/drawing/2014/main" id="{E2059CD2-05F5-719A-ED86-ADB184224789}"/>
-              </a:ext>
-            </a:extLst>
-          </p:cNvPr>
-          <p:cNvSpPr txBox="1"/>
-          <p:nvPr/>
-        </p:nvSpPr>
-        <p:spPr>
-          <a:xfrm>
-            <a:off x="39778" y="2660340"/>
-            <a:ext cx="2065033" cy="307777"/>
-          </a:xfrm>
-          <a:prstGeom prst="rect">
-            <a:avLst/>
-          </a:prstGeom>
-          <a:noFill/>
-        </p:spPr>
-        <p:txBody>
-          <a:bodyPr wrap="square" rtlCol="0">
-            <a:spAutoFit/>
-          </a:bodyPr>
-          <a:lstStyle/>
-          <a:p>
-            <a:r>
-              <a:rPr lang="pt-PT" sz="1400">
-                <a:solidFill>
-                  <a:schemeClr val="bg1"/>
-                </a:solidFill>
-                <a:effectLst/>
-                <a:latin typeface="Poppins" pitchFamily="2" charset="77"/>
-                <a:cs typeface="Poppins" pitchFamily="2" charset="77"/>
-              </a:rPr>
-              <a:t>Pagamento</a:t>
-            </a:r>
-          </a:p>
-        </p:txBody>
-      </p:sp>
-      <p:sp>
-        <p:nvSpPr>
-          <p:cNvPr id="17" name="CaixaDeTexto 10">
-            <a:extLst>
-              <a:ext uri="{FF2B5EF4-FFF2-40B4-BE49-F238E27FC236}">
-                <a16:creationId xmlns:a16="http://schemas.microsoft.com/office/drawing/2014/main" id="{D77F999A-5848-35DE-10DC-CE2AF7702A9B}"/>
-              </a:ext>
-            </a:extLst>
-          </p:cNvPr>
-          <p:cNvSpPr txBox="1"/>
-          <p:nvPr/>
-        </p:nvSpPr>
-        <p:spPr>
-          <a:xfrm>
-            <a:off x="39778" y="2285989"/>
-            <a:ext cx="2065033" cy="307777"/>
-          </a:xfrm>
-          <a:prstGeom prst="rect">
-            <a:avLst/>
-          </a:prstGeom>
-          <a:noFill/>
-        </p:spPr>
-        <p:txBody>
-          <a:bodyPr wrap="square" rtlCol="0">
-            <a:spAutoFit/>
-          </a:bodyPr>
-          <a:lstStyle/>
-          <a:p>
-            <a:r>
-              <a:rPr lang="pt-PT" sz="1400">
-                <a:solidFill>
-                  <a:schemeClr val="bg1"/>
-                </a:solidFill>
-                <a:effectLst/>
-                <a:latin typeface="Poppins" pitchFamily="2" charset="77"/>
-                <a:cs typeface="Poppins" pitchFamily="2" charset="77"/>
-              </a:rPr>
-              <a:t>Investimento</a:t>
-            </a:r>
-          </a:p>
-        </p:txBody>
-      </p:sp>
-      <p:sp>
-        <p:nvSpPr>
-          <p:cNvPr id="19" name="CaixaDeTexto 10">
-            <a:extLst>
-              <a:ext uri="{FF2B5EF4-FFF2-40B4-BE49-F238E27FC236}">
-                <a16:creationId xmlns:a16="http://schemas.microsoft.com/office/drawing/2014/main" id="{AB20D068-0191-EC87-39C8-8ABC2F89A765}"/>
-              </a:ext>
-            </a:extLst>
-          </p:cNvPr>
-          <p:cNvSpPr txBox="1"/>
-          <p:nvPr/>
-        </p:nvSpPr>
-        <p:spPr>
-          <a:xfrm>
-            <a:off x="39778" y="3034691"/>
-            <a:ext cx="2065033" cy="307777"/>
-          </a:xfrm>
-          <a:prstGeom prst="rect">
-            <a:avLst/>
-          </a:prstGeom>
-          <a:noFill/>
-        </p:spPr>
-        <p:txBody>
-          <a:bodyPr wrap="square" rtlCol="0">
-            <a:spAutoFit/>
-          </a:bodyPr>
-          <a:lstStyle/>
-          <a:p>
-            <a:r>
-              <a:rPr lang="pt-PT" sz="1400">
-                <a:solidFill>
-                  <a:schemeClr val="bg1"/>
-                </a:solidFill>
-                <a:effectLst/>
-                <a:latin typeface="Poppins" pitchFamily="2" charset="77"/>
-                <a:cs typeface="Poppins" pitchFamily="2" charset="77"/>
-              </a:rPr>
-              <a:t>Prazos</a:t>
-            </a:r>
-          </a:p>
-        </p:txBody>
-      </p:sp>
-      <p:sp>
-        <p:nvSpPr>
-          <p:cNvPr id="20" name="CaixaDeTexto 10">
-            <a:extLst>
-              <a:ext uri="{FF2B5EF4-FFF2-40B4-BE49-F238E27FC236}">
-                <a16:creationId xmlns:a16="http://schemas.microsoft.com/office/drawing/2014/main" id="{888BC6D8-EFB0-D415-3CDC-094DC4BB423B}"/>
-              </a:ext>
-            </a:extLst>
-          </p:cNvPr>
-          <p:cNvSpPr txBox="1"/>
-          <p:nvPr/>
-        </p:nvSpPr>
-        <p:spPr>
-          <a:xfrm>
-            <a:off x="39778" y="3409042"/>
-            <a:ext cx="2065033" cy="307777"/>
-          </a:xfrm>
-          <a:prstGeom prst="rect">
-            <a:avLst/>
-          </a:prstGeom>
-          <a:noFill/>
-        </p:spPr>
-        <p:txBody>
-          <a:bodyPr wrap="square" rtlCol="0">
-            <a:spAutoFit/>
-          </a:bodyPr>
-          <a:lstStyle/>
-          <a:p>
-            <a:r>
-              <a:rPr lang="pt-PT" sz="1400">
-                <a:solidFill>
-                  <a:schemeClr val="bg1"/>
-                </a:solidFill>
-                <a:effectLst/>
-                <a:latin typeface="Poppins" pitchFamily="2" charset="77"/>
-                <a:cs typeface="Poppins" pitchFamily="2" charset="77"/>
-              </a:rPr>
-              <a:t>Garantia</a:t>
-            </a:r>
-          </a:p>
-        </p:txBody>
-      </p:sp>
-      <p:sp>
-        <p:nvSpPr>
-          <p:cNvPr id="21" name="CaixaDeTexto 10">
-            <a:extLst>
-              <a:ext uri="{FF2B5EF4-FFF2-40B4-BE49-F238E27FC236}">
-                <a16:creationId xmlns:a16="http://schemas.microsoft.com/office/drawing/2014/main" id="{C5F74E3F-2F18-056B-DEF9-116B7217D0EB}"/>
-              </a:ext>
-            </a:extLst>
-          </p:cNvPr>
-          <p:cNvSpPr txBox="1"/>
-          <p:nvPr/>
-        </p:nvSpPr>
-        <p:spPr>
-          <a:xfrm>
-            <a:off x="39778" y="3783395"/>
-            <a:ext cx="2065033" cy="307777"/>
-          </a:xfrm>
-          <a:prstGeom prst="rect">
-            <a:avLst/>
-          </a:prstGeom>
-          <a:noFill/>
-        </p:spPr>
-        <p:txBody>
-          <a:bodyPr wrap="square" rtlCol="0">
-            <a:spAutoFit/>
-          </a:bodyPr>
-          <a:lstStyle/>
-          <a:p>
-            <a:r>
-              <a:rPr lang="pt-PT" sz="1400">
-                <a:solidFill>
-                  <a:schemeClr val="bg1"/>
-                </a:solidFill>
-                <a:effectLst/>
-                <a:latin typeface="Poppins" pitchFamily="2" charset="77"/>
-                <a:cs typeface="Poppins" pitchFamily="2" charset="77"/>
-              </a:rPr>
-              <a:t>Regras </a:t>
-            </a:r>
-          </a:p>
-        </p:txBody>
-      </p:sp>
-      <p:sp>
-        <p:nvSpPr>
-          <p:cNvPr id="23" name="CaixaDeTexto 17">
-            <a:extLst>
-              <a:ext uri="{FF2B5EF4-FFF2-40B4-BE49-F238E27FC236}">
-                <a16:creationId xmlns:a16="http://schemas.microsoft.com/office/drawing/2014/main" id="{C0CA1E5A-9F36-C554-24B3-CBDA6372F5F4}"/>
-              </a:ext>
-            </a:extLst>
-          </p:cNvPr>
-          <p:cNvSpPr txBox="1"/>
-          <p:nvPr/>
-        </p:nvSpPr>
-        <p:spPr>
-          <a:xfrm>
-            <a:off x="2104810" y="852212"/>
-            <a:ext cx="9809795" cy="4001095"/>
-          </a:xfrm>
-          <a:prstGeom prst="rect">
-            <a:avLst/>
-          </a:prstGeom>
-          <a:noFill/>
-        </p:spPr>
-        <p:txBody>
-          <a:bodyPr wrap="square" lIns="91440" tIns="45720" rIns="91440" bIns="45720" anchor="t">
-            <a:spAutoFit/>
-          </a:bodyPr>
-          <a:lstStyle/>
-          <a:p>
-            <a:endParaRPr lang="pt-BR" sz="1600" b="1" dirty="0">
-              <a:solidFill>
-                <a:srgbClr val="FF0000"/>
-              </a:solidFill>
-              <a:latin typeface="Poppins"/>
-              <a:ea typeface="Times New Roman" panose="02020603050405020304" pitchFamily="18" charset="0"/>
-              <a:cs typeface="Poppins"/>
-            </a:endParaRPr>
-          </a:p>
-          <a:p>
-            <a:r>
-              <a:rPr lang="pt-BR" sz="1600" b="1">
-                <a:solidFill>
-                  <a:srgbClr val="FF0000"/>
-                </a:solidFill>
-                <a:latin typeface="Poppins"/>
-                <a:ea typeface="Times New Roman" panose="02020603050405020304" pitchFamily="18" charset="0"/>
-                <a:cs typeface="Poppins"/>
-              </a:rPr>
-              <a:t>1. Projeto </a:t>
-            </a:r>
-            <a:r>
-              <a:rPr lang="pt-BR" sz="1600" b="1" dirty="0">
-                <a:solidFill>
-                  <a:srgbClr val="000000"/>
-                </a:solidFill>
-                <a:latin typeface="Poppins"/>
-                <a:ea typeface="Times New Roman" panose="02020603050405020304" pitchFamily="18" charset="0"/>
-                <a:cs typeface="Poppins"/>
-              </a:rPr>
-              <a:t>- {{ sumario }}</a:t>
-            </a:r>
-            <a:endParaRPr lang="pt-BR" dirty="0"/>
-          </a:p>
-          <a:p>
-            <a:pPr lvl="0">
-              <a:lnSpc>
-                <a:spcPct val="250000"/>
-              </a:lnSpc>
-            </a:pPr>
-            <a:r>
-              <a:rPr lang="pt-BR" sz="1600" b="1" dirty="0">
-                <a:solidFill>
-                  <a:srgbClr val="FF0000"/>
-                </a:solidFill>
-                <a:latin typeface="Poppins" panose="00000500000000000000" pitchFamily="2" charset="0"/>
-                <a:ea typeface="Times New Roman" panose="02020603050405020304" pitchFamily="18" charset="0"/>
-                <a:cs typeface="Poppins" panose="00000500000000000000" pitchFamily="2" charset="0"/>
-              </a:rPr>
-              <a:t>2. Investimento</a:t>
-            </a:r>
-          </a:p>
-          <a:p>
-            <a:pPr lvl="0"/>
-            <a:endParaRPr lang="pt-BR" sz="1400" b="1" dirty="0">
-              <a:solidFill>
-                <a:srgbClr val="FF0000"/>
-              </a:solidFill>
-              <a:latin typeface="Poppins" panose="00000500000000000000" pitchFamily="2" charset="0"/>
-              <a:ea typeface="Times New Roman" panose="02020603050405020304" pitchFamily="18" charset="0"/>
-              <a:cs typeface="Poppins" panose="00000500000000000000" pitchFamily="2" charset="0"/>
-            </a:endParaRPr>
-          </a:p>
-          <a:p>
-            <a:pPr lvl="0"/>
-            <a:r>
-              <a:rPr lang="pt-BR" sz="1600" b="1" dirty="0">
-                <a:solidFill>
-                  <a:srgbClr val="FF0000"/>
-                </a:solidFill>
-                <a:effectLst/>
-                <a:latin typeface="Poppins" panose="00000500000000000000" pitchFamily="2" charset="0"/>
-                <a:ea typeface="Times New Roman" panose="02020603050405020304" pitchFamily="18" charset="0"/>
-                <a:cs typeface="Poppins" panose="00000500000000000000" pitchFamily="2" charset="0"/>
-              </a:rPr>
-              <a:t>3. Condições de Pagamento</a:t>
-            </a:r>
-          </a:p>
-          <a:p>
-            <a:pPr lvl="0"/>
-            <a:endParaRPr lang="pt-BR" sz="1400" b="1" dirty="0">
-              <a:solidFill>
-                <a:srgbClr val="FF0000"/>
-              </a:solidFill>
-              <a:latin typeface="Poppins" panose="00000500000000000000" pitchFamily="2" charset="0"/>
-              <a:ea typeface="Times New Roman" panose="02020603050405020304" pitchFamily="18" charset="0"/>
-              <a:cs typeface="Poppins" panose="00000500000000000000" pitchFamily="2" charset="0"/>
-            </a:endParaRPr>
-          </a:p>
-          <a:p>
-            <a:pPr lvl="0"/>
-            <a:r>
-              <a:rPr lang="pt-BR" sz="1600" b="1" dirty="0">
-                <a:solidFill>
-                  <a:srgbClr val="FF0000"/>
-                </a:solidFill>
-                <a:effectLst/>
-                <a:latin typeface="Poppins" panose="00000500000000000000" pitchFamily="2" charset="0"/>
-                <a:ea typeface="Times New Roman" panose="02020603050405020304" pitchFamily="18" charset="0"/>
-                <a:cs typeface="Poppins" panose="00000500000000000000" pitchFamily="2" charset="0"/>
-              </a:rPr>
-              <a:t>4. Prazos</a:t>
-            </a:r>
-          </a:p>
-          <a:p>
-            <a:pPr lvl="0"/>
-            <a:endParaRPr lang="pt-BR" sz="1400" b="1" dirty="0">
-              <a:solidFill>
-                <a:srgbClr val="FF0000"/>
-              </a:solidFill>
-              <a:latin typeface="Poppins" panose="00000500000000000000" pitchFamily="2" charset="0"/>
-              <a:ea typeface="Times New Roman" panose="02020603050405020304" pitchFamily="18" charset="0"/>
-              <a:cs typeface="Poppins" panose="00000500000000000000" pitchFamily="2" charset="0"/>
-            </a:endParaRPr>
-          </a:p>
-          <a:p>
-            <a:pPr lvl="0"/>
-            <a:r>
-              <a:rPr lang="pt-BR" sz="1600" b="1" dirty="0">
-                <a:solidFill>
-                  <a:srgbClr val="FF0000"/>
-                </a:solidFill>
-                <a:effectLst/>
-                <a:latin typeface="Poppins" panose="00000500000000000000" pitchFamily="2" charset="0"/>
-                <a:ea typeface="Times New Roman" panose="02020603050405020304" pitchFamily="18" charset="0"/>
-                <a:cs typeface="Poppins" panose="00000500000000000000" pitchFamily="2" charset="0"/>
-              </a:rPr>
-              <a:t>5. Garantia</a:t>
-            </a:r>
-          </a:p>
-          <a:p>
-            <a:pPr lvl="0"/>
-            <a:endParaRPr lang="pt-BR" sz="1600" b="1" dirty="0">
-              <a:solidFill>
-                <a:srgbClr val="FF0000"/>
-              </a:solidFill>
-              <a:effectLst/>
-              <a:latin typeface="Poppins" panose="00000500000000000000" pitchFamily="2" charset="0"/>
-              <a:ea typeface="Times New Roman" panose="02020603050405020304" pitchFamily="18" charset="0"/>
-              <a:cs typeface="Poppins" panose="00000500000000000000" pitchFamily="2" charset="0"/>
-            </a:endParaRPr>
-          </a:p>
-          <a:p>
-            <a:pPr lvl="0"/>
-            <a:r>
-              <a:rPr lang="pt-BR" sz="1600" b="1" dirty="0">
-                <a:solidFill>
-                  <a:srgbClr val="FF0000"/>
-                </a:solidFill>
-                <a:latin typeface="Poppins" panose="00000500000000000000" pitchFamily="2" charset="0"/>
-                <a:ea typeface="Times New Roman" panose="02020603050405020304" pitchFamily="18" charset="0"/>
-                <a:cs typeface="Poppins" panose="00000500000000000000" pitchFamily="2" charset="0"/>
-              </a:rPr>
-              <a:t>6</a:t>
-            </a:r>
-            <a:r>
-              <a:rPr lang="pt-BR" sz="1600" b="1" dirty="0">
-                <a:solidFill>
-                  <a:srgbClr val="FF0000"/>
-                </a:solidFill>
-                <a:effectLst/>
-                <a:latin typeface="Poppins" panose="00000500000000000000" pitchFamily="2" charset="0"/>
-                <a:ea typeface="Times New Roman" panose="02020603050405020304" pitchFamily="18" charset="0"/>
-                <a:cs typeface="Poppins" panose="00000500000000000000" pitchFamily="2" charset="0"/>
-              </a:rPr>
-              <a:t>. Responsabilidades da Contratada</a:t>
-            </a:r>
-          </a:p>
-          <a:p>
-            <a:pPr lvl="0"/>
-            <a:endParaRPr lang="pt-BR" sz="1400" b="1" dirty="0">
-              <a:solidFill>
-                <a:srgbClr val="FF0000"/>
-              </a:solidFill>
-              <a:effectLst/>
-              <a:latin typeface="Poppins" panose="00000500000000000000" pitchFamily="2" charset="0"/>
-              <a:ea typeface="Times New Roman" panose="02020603050405020304" pitchFamily="18" charset="0"/>
-              <a:cs typeface="Poppins" panose="00000500000000000000" pitchFamily="2" charset="0"/>
-            </a:endParaRPr>
-          </a:p>
-          <a:p>
-            <a:pPr lvl="0"/>
-            <a:r>
-              <a:rPr lang="pt-BR" sz="1600" b="1" dirty="0">
-                <a:solidFill>
-                  <a:srgbClr val="FF0000"/>
-                </a:solidFill>
-                <a:latin typeface="Poppins" panose="00000500000000000000" pitchFamily="2" charset="0"/>
-                <a:ea typeface="Times New Roman" panose="02020603050405020304" pitchFamily="18" charset="0"/>
-                <a:cs typeface="Poppins" panose="00000500000000000000" pitchFamily="2" charset="0"/>
-              </a:rPr>
-              <a:t>7</a:t>
-            </a:r>
-            <a:r>
-              <a:rPr lang="pt-BR" sz="1600" b="1" dirty="0">
-                <a:solidFill>
-                  <a:srgbClr val="FF0000"/>
-                </a:solidFill>
-                <a:effectLst/>
-                <a:latin typeface="Poppins" panose="00000500000000000000" pitchFamily="2" charset="0"/>
-                <a:ea typeface="Times New Roman" panose="02020603050405020304" pitchFamily="18" charset="0"/>
-                <a:cs typeface="Poppins" panose="00000500000000000000" pitchFamily="2" charset="0"/>
-              </a:rPr>
-              <a:t>. Responsabilidades do Contratante</a:t>
-            </a:r>
-          </a:p>
-          <a:p>
-            <a:pPr lvl="0"/>
-            <a:endParaRPr lang="pt-BR" sz="1400" b="1" dirty="0">
-              <a:solidFill>
-                <a:srgbClr val="FF0000"/>
-              </a:solidFill>
-              <a:latin typeface="Poppins" panose="00000500000000000000" pitchFamily="2" charset="0"/>
-              <a:ea typeface="Times New Roman" panose="02020603050405020304" pitchFamily="18" charset="0"/>
-              <a:cs typeface="Poppins" panose="00000500000000000000" pitchFamily="2" charset="0"/>
-            </a:endParaRPr>
-          </a:p>
-          <a:p>
-            <a:r>
-              <a:rPr lang="pt-BR" sz="1600" b="1" dirty="0">
-                <a:solidFill>
-                  <a:srgbClr val="FF0000"/>
-                </a:solidFill>
-                <a:latin typeface="Poppins" panose="00000500000000000000" pitchFamily="2" charset="0"/>
-                <a:ea typeface="Times New Roman" panose="02020603050405020304" pitchFamily="18" charset="0"/>
-                <a:cs typeface="Poppins" panose="00000500000000000000" pitchFamily="2" charset="0"/>
-              </a:rPr>
-              <a:t>8</a:t>
-            </a:r>
-            <a:r>
-              <a:rPr lang="pt-BR" sz="1600" b="1" dirty="0">
-                <a:solidFill>
-                  <a:srgbClr val="FF0000"/>
-                </a:solidFill>
-                <a:effectLst/>
-                <a:latin typeface="Poppins" panose="00000500000000000000" pitchFamily="2" charset="0"/>
-                <a:ea typeface="Times New Roman" panose="02020603050405020304" pitchFamily="18" charset="0"/>
-                <a:cs typeface="Poppins" panose="00000500000000000000" pitchFamily="2" charset="0"/>
-              </a:rPr>
-              <a:t>. Considerações Gerais</a:t>
-            </a:r>
-          </a:p>
-        </p:txBody>
-      </p:sp>
-      <p:sp>
-        <p:nvSpPr>
-          <p:cNvPr id="31" name="CaixaDeTexto 15">
-            <a:extLst>
-              <a:ext uri="{FF2B5EF4-FFF2-40B4-BE49-F238E27FC236}">
-                <a16:creationId xmlns:a16="http://schemas.microsoft.com/office/drawing/2014/main" id="{5B7FCF8A-1C73-1893-254C-F8C34FD1384B}"/>
-              </a:ext>
-            </a:extLst>
-          </p:cNvPr>
-          <p:cNvSpPr txBox="1"/>
-          <p:nvPr/>
-        </p:nvSpPr>
-        <p:spPr>
-          <a:xfrm>
-            <a:off x="2104811" y="317431"/>
-            <a:ext cx="2847132" cy="584775"/>
-          </a:xfrm>
-          <a:prstGeom prst="rect">
-            <a:avLst/>
-          </a:prstGeom>
-          <a:noFill/>
-        </p:spPr>
-        <p:txBody>
-          <a:bodyPr wrap="square">
-            <a:spAutoFit/>
-          </a:bodyPr>
-          <a:lstStyle/>
-          <a:p>
-            <a:pPr>
-              <a:defRPr/>
-            </a:pPr>
-            <a:r>
-              <a:rPr lang="pt-BR" sz="3200" b="1">
-                <a:solidFill>
-                  <a:srgbClr val="FF0000"/>
-                </a:solidFill>
-                <a:latin typeface="Poppins Bold" panose="00000800000000000000" pitchFamily="2" charset="0"/>
-                <a:cs typeface="Poppins Bold" panose="00000800000000000000" pitchFamily="2" charset="0"/>
-              </a:rPr>
-              <a:t>Sumário</a:t>
-            </a:r>
-            <a:endParaRPr lang="pt-BR" sz="2800" b="1">
-              <a:solidFill>
-                <a:srgbClr val="FF0000"/>
-              </a:solidFill>
-              <a:latin typeface="Poppins Bold" panose="00000800000000000000" pitchFamily="2" charset="0"/>
-              <a:cs typeface="Poppins Bold" panose="00000800000000000000" pitchFamily="2" charset="0"/>
-            </a:endParaRPr>
-          </a:p>
-        </p:txBody>
-      </p:sp>
-      <p:sp>
-        <p:nvSpPr>
-          <p:cNvPr id="2" name="CaixaDeTexto 1">
-            <a:extLst>
-              <a:ext uri="{FF2B5EF4-FFF2-40B4-BE49-F238E27FC236}">
-                <a16:creationId xmlns:a16="http://schemas.microsoft.com/office/drawing/2014/main" id="{FE30F853-B5CF-F55D-20CC-9267254596C3}"/>
-              </a:ext>
-            </a:extLst>
-          </p:cNvPr>
-          <p:cNvSpPr txBox="1"/>
-          <p:nvPr/>
-        </p:nvSpPr>
-        <p:spPr>
-          <a:xfrm>
-            <a:off x="39778" y="4431263"/>
-            <a:ext cx="1063214" cy="688650"/>
-          </a:xfrm>
-          <a:prstGeom prst="rect">
-            <a:avLst/>
-          </a:prstGeom>
-          <a:noFill/>
-        </p:spPr>
-        <p:txBody>
-          <a:bodyPr wrap="square" rtlCol="0">
-            <a:spAutoFit/>
-          </a:bodyPr>
-          <a:lstStyle/>
-          <a:p>
-            <a:pPr algn="just">
-              <a:lnSpc>
-                <a:spcPct val="150000"/>
-              </a:lnSpc>
-            </a:pPr>
-            <a:r>
-              <a:rPr lang="pt-BR" sz="1300">
-                <a:solidFill>
-                  <a:schemeClr val="bg1"/>
-                </a:solidFill>
-                <a:latin typeface="Poppins" pitchFamily="2" charset="77"/>
-                <a:cs typeface="Poppins" pitchFamily="2" charset="77"/>
-              </a:rPr>
-              <a:t>Proposta</a:t>
-            </a:r>
-          </a:p>
-          <a:p>
-            <a:pPr algn="just">
-              <a:lnSpc>
-                <a:spcPct val="150000"/>
-              </a:lnSpc>
-            </a:pPr>
-            <a:r>
-              <a:rPr lang="pt-BR" sz="1400" b="1">
-                <a:solidFill>
-                  <a:schemeClr val="bg1"/>
-                </a:solidFill>
-                <a:latin typeface="Poppins" pitchFamily="2" charset="77"/>
-                <a:cs typeface="Poppins" pitchFamily="2" charset="77"/>
-              </a:rPr>
-              <a:t>P </a:t>
-            </a:r>
-          </a:p>
-        </p:txBody>
-      </p:sp>
     </p:spTree>
     <p:extLst>
       <p:ext uri="{BB962C8B-B14F-4D97-AF65-F5344CB8AC3E}">

--- a/Backend/services/pptx-generator-service/slides/global/sumario.pptx
+++ b/Backend/services/pptx-generator-service/slides/global/sumario.pptx
@@ -118,6 +118,7 @@
 <file path=ppt/revisionInfo.xml><?xml version="1.0" encoding="utf-8"?>
 <p1510:revInfo xmlns:a="http://schemas.openxmlformats.org/drawingml/2006/main" xmlns:r="http://schemas.openxmlformats.org/officeDocument/2006/relationships" xmlns:p1510="http://schemas.microsoft.com/office/powerpoint/2015/10/main">
   <p1510:revLst>
+    <p1510:client id="{5341B10F-A1A1-D5F1-9076-53EA8486EE67}" v="13" dt="2026-05-26T22:54:00.723"/>
     <p1510:client id="{65108A40-012A-D12E-02C7-0A545B7A839A}" v="54" dt="2026-05-26T18:04:49.809"/>
   </p1510:revLst>
 </p1510:revInfo>
@@ -3552,7 +3553,7 @@
         <p:spPr>
           <a:xfrm>
             <a:off x="2104810" y="852212"/>
-            <a:ext cx="9809795" cy="4001095"/>
+            <a:ext cx="9809795" cy="4247317"/>
           </a:xfrm>
           <a:prstGeom prst="rect">
             <a:avLst/>
@@ -3584,8 +3585,18 @@
                 <a:ea typeface="Times New Roman" panose="02020603050405020304" pitchFamily="18" charset="0"/>
                 <a:cs typeface="Poppins"/>
               </a:rPr>
-              <a:t>1. Projeto </a:t>
-            </a:r>
+              <a:t>1. Projeto</a:t>
+            </a:r>
+            <a:endParaRPr lang="pt-BR" sz="1600" b="1">
+              <a:solidFill>
+                <a:srgbClr val="000000"/>
+              </a:solidFill>
+              <a:latin typeface="Poppins"/>
+              <a:ea typeface="Times New Roman" panose="02020603050405020304" pitchFamily="18" charset="0"/>
+              <a:cs typeface="Poppins"/>
+            </a:endParaRPr>
+          </a:p>
+          <a:p>
             <a:r>
               <a:rPr lang="pt-BR" sz="1600" b="1">
                 <a:solidFill>
@@ -3595,7 +3606,7 @@
                 <a:ea typeface="Times New Roman" panose="02020603050405020304" pitchFamily="18" charset="0"/>
                 <a:cs typeface="Poppins"/>
               </a:rPr>
-              <a:t>- {{ sumario }}</a:t>
+              <a:t> {{ sumario }}</a:t>
             </a:r>
             <a:endParaRPr lang="pt-BR"/>
           </a:p>
